--- a/Documentation/Prezentare Disertatie.pptx
+++ b/Documentation/Prezentare Disertatie.pptx
@@ -5,7 +5,7 @@
     <p:sldMasterId id="2147483648" r:id="rId4"/>
   </p:sldMasterIdLst>
   <p:notesMasterIdLst>
-    <p:notesMasterId r:id="rId14"/>
+    <p:notesMasterId r:id="rId16"/>
   </p:notesMasterIdLst>
   <p:sldIdLst>
     <p:sldId id="530" r:id="rId5"/>
@@ -13,10 +13,12 @@
     <p:sldId id="551" r:id="rId7"/>
     <p:sldId id="549" r:id="rId8"/>
     <p:sldId id="554" r:id="rId9"/>
-    <p:sldId id="539" r:id="rId10"/>
-    <p:sldId id="550" r:id="rId11"/>
-    <p:sldId id="543" r:id="rId12"/>
-    <p:sldId id="544" r:id="rId13"/>
+    <p:sldId id="555" r:id="rId10"/>
+    <p:sldId id="539" r:id="rId11"/>
+    <p:sldId id="550" r:id="rId12"/>
+    <p:sldId id="556" r:id="rId13"/>
+    <p:sldId id="543" r:id="rId14"/>
+    <p:sldId id="544" r:id="rId15"/>
   </p:sldIdLst>
   <p:sldSz cx="12192000" cy="6858000"/>
   <p:notesSz cx="6858000" cy="9144000"/>
@@ -217,7 +219,7 @@
           <a:p>
             <a:fld id="{3F00BCFC-AFFD-334C-A183-6116BAFDF92B}" type="datetimeFigureOut">
               <a:rPr lang="en-US" smtClean="0"/>
-              <a:t>6/14/2026</a:t>
+              <a:t>6/20/2026</a:t>
             </a:fld>
             <a:endParaRPr lang="en-US" dirty="0"/>
           </a:p>
@@ -17095,6 +17097,269 @@
 </p:sld>
 </file>
 
+<file path=ppt/slides/slide10.xml><?xml version="1.0" encoding="utf-8"?>
+<p:sld xmlns:a="http://schemas.openxmlformats.org/drawingml/2006/main" xmlns:r="http://schemas.openxmlformats.org/officeDocument/2006/relationships" xmlns:p="http://schemas.openxmlformats.org/presentationml/2006/main">
+  <p:cSld>
+    <p:spTree>
+      <p:nvGrpSpPr>
+        <p:cNvPr id="1" name=""/>
+        <p:cNvGrpSpPr/>
+        <p:nvPr/>
+      </p:nvGrpSpPr>
+      <p:grpSpPr>
+        <a:xfrm>
+          <a:off x="0" y="0"/>
+          <a:ext cx="0" cy="0"/>
+          <a:chOff x="0" y="0"/>
+          <a:chExt cx="0" cy="0"/>
+        </a:xfrm>
+      </p:grpSpPr>
+      <p:sp>
+        <p:nvSpPr>
+          <p:cNvPr id="2" name="Title 1">
+            <a:extLst>
+              <a:ext uri="{FF2B5EF4-FFF2-40B4-BE49-F238E27FC236}">
+                <a16:creationId xmlns:a16="http://schemas.microsoft.com/office/drawing/2014/main" id="{48C5BC92-868A-26B2-CBC0-C9D94E65F1A4}"/>
+              </a:ext>
+            </a:extLst>
+          </p:cNvPr>
+          <p:cNvSpPr>
+            <a:spLocks noGrp="1"/>
+          </p:cNvSpPr>
+          <p:nvPr>
+            <p:ph type="ctrTitle"/>
+          </p:nvPr>
+        </p:nvSpPr>
+        <p:spPr>
+          <a:xfrm>
+            <a:off x="2228088" y="1997964"/>
+            <a:ext cx="7735824" cy="1069848"/>
+          </a:xfrm>
+        </p:spPr>
+        <p:txBody>
+          <a:bodyPr/>
+          <a:lstStyle/>
+          <a:p>
+            <a:r>
+              <a:rPr lang="en-US" sz="4000" b="1" spc="600" dirty="0">
+                <a:ln w="28575">
+                  <a:noFill/>
+                  <a:prstDash val="solid"/>
+                </a:ln>
+                <a:solidFill>
+                  <a:schemeClr val="bg1"/>
+                </a:solidFill>
+                <a:latin typeface="Tw Cen MT" panose="020B0602020104020603" pitchFamily="34" charset="77"/>
+                <a:ea typeface="Verdana" panose="020B0604030504040204" pitchFamily="34" charset="0"/>
+                <a:cs typeface="Verdana" panose="020B0604030504040204" pitchFamily="34" charset="0"/>
+              </a:rPr>
+              <a:t>Conclusions</a:t>
+            </a:r>
+            <a:endParaRPr lang="en-US" dirty="0"/>
+          </a:p>
+        </p:txBody>
+      </p:sp>
+      <p:sp>
+        <p:nvSpPr>
+          <p:cNvPr id="3" name="Subtitle 2">
+            <a:extLst>
+              <a:ext uri="{FF2B5EF4-FFF2-40B4-BE49-F238E27FC236}">
+                <a16:creationId xmlns:a16="http://schemas.microsoft.com/office/drawing/2014/main" id="{6F9C1627-7A56-025E-482D-E2AB014EDF92}"/>
+              </a:ext>
+            </a:extLst>
+          </p:cNvPr>
+          <p:cNvSpPr>
+            <a:spLocks noGrp="1"/>
+          </p:cNvSpPr>
+          <p:nvPr>
+            <p:ph type="subTitle" idx="1"/>
+          </p:nvPr>
+        </p:nvSpPr>
+        <p:spPr>
+          <a:xfrm>
+            <a:off x="2228088" y="3429000"/>
+            <a:ext cx="7735824" cy="1133856"/>
+          </a:xfrm>
+        </p:spPr>
+        <p:txBody>
+          <a:bodyPr/>
+          <a:lstStyle/>
+          <a:p>
+            <a:pPr marL="285750" indent="-285750" algn="l">
+              <a:buFont typeface="Arial" panose="020B0604020202020204" pitchFamily="34" charset="0"/>
+              <a:buChar char="•"/>
+            </a:pPr>
+            <a:r>
+              <a:rPr lang="en-US" dirty="0"/>
+              <a:t>Average end-to-end calorie error of 1.3% vs personalized target</a:t>
+            </a:r>
+          </a:p>
+          <a:p>
+            <a:pPr marL="285750" indent="-285750" algn="l">
+              <a:buFont typeface="Arial" panose="020B0604020202020204" pitchFamily="34" charset="0"/>
+              <a:buChar char="•"/>
+            </a:pPr>
+            <a:r>
+              <a:rPr lang="en-US" dirty="0"/>
+              <a:t>Successfully automated personalized meal plan generation combining MLP classification and constrained optimization</a:t>
+            </a:r>
+          </a:p>
+          <a:p>
+            <a:pPr marL="285750" indent="-285750" algn="l">
+              <a:buFont typeface="Arial" panose="020B0604020202020204" pitchFamily="34" charset="0"/>
+              <a:buChar char="•"/>
+            </a:pPr>
+            <a:r>
+              <a:rPr lang="en-US" dirty="0"/>
+              <a:t>Microservice architecture enabled independent deployment of each service</a:t>
+            </a:r>
+          </a:p>
+          <a:p>
+            <a:pPr marL="285750" indent="-285750" algn="l">
+              <a:buFont typeface="Arial" panose="020B0604020202020204" pitchFamily="34" charset="0"/>
+              <a:buChar char="•"/>
+            </a:pPr>
+            <a:r>
+              <a:rPr lang="en-US" dirty="0"/>
+              <a:t>Secure cross-domain authentication via JWT + refresh token rotation</a:t>
+            </a:r>
+          </a:p>
+          <a:p>
+            <a:pPr marL="285750" indent="-285750" algn="l">
+              <a:buFont typeface="Arial" panose="020B0604020202020204" pitchFamily="34" charset="0"/>
+              <a:buChar char="•"/>
+            </a:pPr>
+            <a:r>
+              <a:rPr lang="en-US" dirty="0"/>
+              <a:t>Future: constrain meal generation to user-available ingredients and ensure real world validation by tracking a user’s weight/energy over a month</a:t>
+            </a:r>
+          </a:p>
+        </p:txBody>
+      </p:sp>
+    </p:spTree>
+    <p:extLst>
+      <p:ext uri="{BB962C8B-B14F-4D97-AF65-F5344CB8AC3E}">
+        <p14:creationId xmlns:p14="http://schemas.microsoft.com/office/powerpoint/2010/main" val="1958759625"/>
+      </p:ext>
+    </p:extLst>
+  </p:cSld>
+  <p:clrMapOvr>
+    <a:masterClrMapping/>
+  </p:clrMapOvr>
+</p:sld>
+</file>
+
+<file path=ppt/slides/slide11.xml><?xml version="1.0" encoding="utf-8"?>
+<p:sld xmlns:a="http://schemas.openxmlformats.org/drawingml/2006/main" xmlns:r="http://schemas.openxmlformats.org/officeDocument/2006/relationships" xmlns:p="http://schemas.openxmlformats.org/presentationml/2006/main">
+  <p:cSld>
+    <p:spTree>
+      <p:nvGrpSpPr>
+        <p:cNvPr id="1" name=""/>
+        <p:cNvGrpSpPr/>
+        <p:nvPr/>
+      </p:nvGrpSpPr>
+      <p:grpSpPr>
+        <a:xfrm>
+          <a:off x="0" y="0"/>
+          <a:ext cx="0" cy="0"/>
+          <a:chOff x="0" y="0"/>
+          <a:chExt cx="0" cy="0"/>
+        </a:xfrm>
+      </p:grpSpPr>
+      <p:sp>
+        <p:nvSpPr>
+          <p:cNvPr id="2" name="Title 1">
+            <a:extLst>
+              <a:ext uri="{FF2B5EF4-FFF2-40B4-BE49-F238E27FC236}">
+                <a16:creationId xmlns:a16="http://schemas.microsoft.com/office/drawing/2014/main" id="{2C9E1892-81E6-551C-7B5A-DEA68224520B}"/>
+              </a:ext>
+            </a:extLst>
+          </p:cNvPr>
+          <p:cNvSpPr>
+            <a:spLocks noGrp="1"/>
+          </p:cNvSpPr>
+          <p:nvPr>
+            <p:ph type="title"/>
+          </p:nvPr>
+        </p:nvSpPr>
+        <p:spPr>
+          <a:xfrm>
+            <a:off x="6665976" y="2157984"/>
+            <a:ext cx="4718304" cy="1069848"/>
+          </a:xfrm>
+        </p:spPr>
+        <p:txBody>
+          <a:bodyPr/>
+          <a:lstStyle/>
+          <a:p>
+            <a:r>
+              <a:rPr lang="en-US" sz="4800" b="1" spc="600" dirty="0" err="1">
+                <a:ln w="28575">
+                  <a:noFill/>
+                  <a:prstDash val="solid"/>
+                </a:ln>
+                <a:solidFill>
+                  <a:schemeClr val="bg1"/>
+                </a:solidFill>
+                <a:latin typeface="Tw Cen MT" panose="020B0602020104020603" pitchFamily="34" charset="77"/>
+              </a:rPr>
+              <a:t>Q&amp;a</a:t>
+            </a:r>
+            <a:endParaRPr lang="en-US" dirty="0"/>
+          </a:p>
+        </p:txBody>
+      </p:sp>
+      <p:sp>
+        <p:nvSpPr>
+          <p:cNvPr id="3" name="Text Placeholder 2">
+            <a:extLst>
+              <a:ext uri="{FF2B5EF4-FFF2-40B4-BE49-F238E27FC236}">
+                <a16:creationId xmlns:a16="http://schemas.microsoft.com/office/drawing/2014/main" id="{55519D01-29BE-BE76-41C5-9D58AD8119DC}"/>
+              </a:ext>
+            </a:extLst>
+          </p:cNvPr>
+          <p:cNvSpPr>
+            <a:spLocks noGrp="1"/>
+          </p:cNvSpPr>
+          <p:nvPr>
+            <p:ph type="body" idx="1"/>
+          </p:nvPr>
+        </p:nvSpPr>
+        <p:spPr>
+          <a:xfrm>
+            <a:off x="5779363" y="3374136"/>
+            <a:ext cx="5531765" cy="656326"/>
+          </a:xfrm>
+        </p:spPr>
+        <p:txBody>
+          <a:bodyPr/>
+          <a:lstStyle/>
+          <a:p>
+            <a:pPr algn="l"/>
+            <a:r>
+              <a:rPr lang="en-US" b="1" dirty="0">
+                <a:latin typeface="Segoe UI Light" panose="020B0502040204020203" pitchFamily="34" charset="0"/>
+                <a:cs typeface="Segoe UI Light" panose="020B0502040204020203" pitchFamily="34" charset="0"/>
+              </a:rPr>
+              <a:t>Thank you for your attention!</a:t>
+            </a:r>
+            <a:endParaRPr lang="en-US" dirty="0"/>
+          </a:p>
+        </p:txBody>
+      </p:sp>
+    </p:spTree>
+    <p:extLst>
+      <p:ext uri="{BB962C8B-B14F-4D97-AF65-F5344CB8AC3E}">
+        <p14:creationId xmlns:p14="http://schemas.microsoft.com/office/powerpoint/2010/main" val="1877701230"/>
+      </p:ext>
+    </p:extLst>
+  </p:cSld>
+  <p:clrMapOvr>
+    <a:masterClrMapping/>
+  </p:clrMapOvr>
+</p:sld>
+</file>
+
 <file path=ppt/slides/slide2.xml><?xml version="1.0" encoding="utf-8"?>
 <p:sld xmlns:a="http://schemas.openxmlformats.org/drawingml/2006/main" xmlns:r="http://schemas.openxmlformats.org/officeDocument/2006/relationships" xmlns:p="http://schemas.openxmlformats.org/presentationml/2006/main">
   <p:cSld>
@@ -17297,7 +17562,12 @@
             <p:ph sz="quarter" idx="14"/>
           </p:nvPr>
         </p:nvSpPr>
-        <p:spPr/>
+        <p:spPr>
+          <a:xfrm>
+            <a:off x="7973568" y="2743200"/>
+            <a:ext cx="3438144" cy="2578608"/>
+          </a:xfrm>
+        </p:spPr>
         <p:txBody>
           <a:bodyPr/>
           <a:lstStyle/>
@@ -17308,7 +17578,7 @@
             </a:r>
             <a:r>
               <a:rPr lang="en-US" dirty="0"/>
-              <a:t> automates personalized meal plan generation by combining physiological data, MLP classification and constrained optimization.</a:t>
+              <a:t> automates personalized meal plan generation by calculating BMR and TDEE, then applying MLP classification and constrained optimization to generate tailored daily meal plans.</a:t>
             </a:r>
           </a:p>
         </p:txBody>
@@ -17433,7 +17703,7 @@
         </p:nvSpPr>
         <p:spPr>
           <a:xfrm>
-            <a:off x="839788" y="2057400"/>
+            <a:off x="836612" y="2301240"/>
             <a:ext cx="3932237" cy="3811588"/>
           </a:xfrm>
         </p:spPr>
@@ -17817,35 +18087,42 @@
           <a:p>
             <a:pPr marL="457200" indent="-457200"/>
             <a:r>
-              <a:rPr lang="en-US" dirty="0"/>
+              <a:rPr lang="en-US" sz="2400" dirty="0"/>
               <a:t>Pre-trained neural network for meal selection</a:t>
             </a:r>
           </a:p>
           <a:p>
             <a:pPr marL="457200" indent="-457200"/>
             <a:r>
-              <a:rPr lang="en-US" dirty="0"/>
+              <a:rPr lang="en-US" sz="2400" dirty="0"/>
               <a:t>Input: calorie target, protein target, minimum fat</a:t>
             </a:r>
           </a:p>
           <a:p>
             <a:pPr marL="457200" indent="-457200"/>
             <a:r>
-              <a:rPr lang="en-US" dirty="0"/>
+              <a:rPr lang="en-US" sz="2400" dirty="0"/>
               <a:t>Output: top K most suitable meal ID’s</a:t>
             </a:r>
           </a:p>
           <a:p>
             <a:pPr marL="457200" indent="-457200"/>
             <a:r>
-              <a:rPr lang="en-US" dirty="0"/>
+              <a:rPr lang="en-US" sz="2400" dirty="0"/>
               <a:t>Trained offline, loaded at service startup</a:t>
             </a:r>
           </a:p>
-        </p:txBody>
-      </p:sp>
-      <mc:AlternateContent xmlns:mc="http://schemas.openxmlformats.org/markup-compatibility/2006">
-        <mc:Choice xmlns:a14="http://schemas.microsoft.com/office/drawing/2010/main" Requires="a14">
+          <a:p>
+            <a:pPr marL="457200" indent="-457200"/>
+            <a:r>
+              <a:rPr lang="en-US" sz="2400" dirty="0"/>
+              <a:t>Training Top-K accuracy – Top1: 81%, Top5: 99.82%, Top15: 100%</a:t>
+            </a:r>
+          </a:p>
+        </p:txBody>
+      </p:sp>
+      <mc:AlternateContent xmlns:mc="http://schemas.openxmlformats.org/markup-compatibility/2006" xmlns:a14="http://schemas.microsoft.com/office/drawing/2010/main">
+        <mc:Choice Requires="a14">
           <p:sp>
             <p:nvSpPr>
               <p:cNvPr id="18" name="Content Placeholder 3">
@@ -17883,39 +18160,41 @@
               <a:p>
                 <a:pPr marL="457200" indent="-457200"/>
                 <a:r>
-                  <a:rPr lang="en-US" dirty="0"/>
+                  <a:rPr lang="en-US" sz="2400" dirty="0"/>
                   <a:t>Determines optimal ingredient portion sizes </a:t>
                 </a:r>
               </a:p>
               <a:p>
                 <a:pPr marL="457200" indent="-457200"/>
                 <a:r>
-                  <a:rPr lang="en-US" dirty="0"/>
+                  <a:rPr lang="en-US" sz="2400" dirty="0"/>
                   <a:t>Enforces minimum fat constraint</a:t>
                 </a:r>
               </a:p>
               <a:p>
                 <a:pPr marL="457200" indent="-457200"/>
                 <a:r>
-                  <a:rPr lang="en-US" dirty="0"/>
+                  <a:rPr lang="en-US" sz="2400" dirty="0"/>
                   <a:t>Category-specific bounds per ingredient (Dairy: 30-300g)</a:t>
                 </a:r>
               </a:p>
               <a:p>
                 <a:pPr marL="457200" indent="-457200"/>
                 <a:r>
-                  <a:rPr lang="en-US" dirty="0"/>
+                  <a:rPr lang="en-US" sz="2400" dirty="0"/>
                   <a:t>Objective function: </a:t>
                 </a:r>
                 <a:br>
-                  <a:rPr lang="en-US" dirty="0"/>
+                  <a:rPr lang="en-US" sz="2400" dirty="0"/>
                 </a:br>
                 <a14:m>
                   <m:oMath xmlns:m="http://schemas.openxmlformats.org/officeDocument/2006/math">
                     <m:func>
                       <m:funcPr>
                         <m:ctrlPr>
-                          <a:rPr lang="en-US" sz="2400"/>
+                          <a:rPr lang="en-US" sz="2400" i="1">
+                            <a:latin typeface="Cambria Math" panose="02040503050406030204" pitchFamily="18" charset="0"/>
+                          </a:rPr>
                         </m:ctrlPr>
                       </m:funcPr>
                       <m:fName>
@@ -17923,7 +18202,9 @@
                           <m:rPr>
                             <m:sty m:val="p"/>
                           </m:rPr>
-                          <a:rPr lang="en-US" sz="2400"/>
+                          <a:rPr lang="en-US" sz="2400">
+                            <a:latin typeface="Cambria Math" panose="02040503050406030204" pitchFamily="18" charset="0"/>
+                          </a:rPr>
                           <m:t>min</m:t>
                         </m:r>
                       </m:fName>
@@ -17940,63 +18221,85 @@
                     <m:sSup>
                       <m:sSupPr>
                         <m:ctrlPr>
-                          <a:rPr lang="en-US" sz="2400" i="1"/>
+                          <a:rPr lang="en-US" sz="2400" i="1">
+                            <a:latin typeface="Cambria Math" panose="02040503050406030204" pitchFamily="18" charset="0"/>
+                          </a:rPr>
                         </m:ctrlPr>
                       </m:sSupPr>
                       <m:e>
                         <m:d>
                           <m:dPr>
                             <m:ctrlPr>
-                              <a:rPr lang="en-US" sz="2400" i="1"/>
+                              <a:rPr lang="en-US" sz="2400" i="1">
+                                <a:latin typeface="Cambria Math" panose="02040503050406030204" pitchFamily="18" charset="0"/>
+                              </a:rPr>
                             </m:ctrlPr>
                           </m:dPr>
                           <m:e>
                             <m:r>
-                              <a:rPr lang="en-US" sz="2400" i="1"/>
+                              <a:rPr lang="en-US" sz="2400" i="1">
+                                <a:latin typeface="Cambria Math" panose="02040503050406030204" pitchFamily="18" charset="0"/>
+                              </a:rPr>
                               <m:t>𝑐𝑎</m:t>
                             </m:r>
                             <m:sSub>
                               <m:sSubPr>
                                 <m:ctrlPr>
-                                  <a:rPr lang="en-US" sz="2400" i="1"/>
+                                  <a:rPr lang="en-US" sz="2400" i="1">
+                                    <a:latin typeface="Cambria Math" panose="02040503050406030204" pitchFamily="18" charset="0"/>
+                                  </a:rPr>
                                 </m:ctrlPr>
                               </m:sSubPr>
                               <m:e>
                                 <m:r>
-                                  <a:rPr lang="en-US" sz="2400" i="1"/>
+                                  <a:rPr lang="en-US" sz="2400" i="1">
+                                    <a:latin typeface="Cambria Math" panose="02040503050406030204" pitchFamily="18" charset="0"/>
+                                  </a:rPr>
                                   <m:t>𝑙</m:t>
                                 </m:r>
                               </m:e>
                               <m:sub>
                                 <m:r>
-                                  <a:rPr lang="en-US" sz="2400" i="1"/>
+                                  <a:rPr lang="en-US" sz="2400" i="1">
+                                    <a:latin typeface="Cambria Math" panose="02040503050406030204" pitchFamily="18" charset="0"/>
+                                  </a:rPr>
                                   <m:t>𝑐𝑢𝑟𝑟𝑒𝑛𝑡</m:t>
                                 </m:r>
                               </m:sub>
                             </m:sSub>
                             <m:r>
-                              <a:rPr lang="en-US" sz="2400"/>
+                              <a:rPr lang="en-US" sz="2400">
+                                <a:latin typeface="Cambria Math" panose="02040503050406030204" pitchFamily="18" charset="0"/>
+                              </a:rPr>
                               <m:t>−</m:t>
                             </m:r>
                             <m:r>
-                              <a:rPr lang="en-US" sz="2400" i="1"/>
+                              <a:rPr lang="en-US" sz="2400" i="1">
+                                <a:latin typeface="Cambria Math" panose="02040503050406030204" pitchFamily="18" charset="0"/>
+                              </a:rPr>
                               <m:t>𝑐𝑎</m:t>
                             </m:r>
                             <m:sSub>
                               <m:sSubPr>
                                 <m:ctrlPr>
-                                  <a:rPr lang="en-US" sz="2400" i="1"/>
+                                  <a:rPr lang="en-US" sz="2400" i="1">
+                                    <a:latin typeface="Cambria Math" panose="02040503050406030204" pitchFamily="18" charset="0"/>
+                                  </a:rPr>
                                 </m:ctrlPr>
                               </m:sSubPr>
                               <m:e>
                                 <m:r>
-                                  <a:rPr lang="en-US" sz="2400" i="1"/>
+                                  <a:rPr lang="en-US" sz="2400" i="1">
+                                    <a:latin typeface="Cambria Math" panose="02040503050406030204" pitchFamily="18" charset="0"/>
+                                  </a:rPr>
                                   <m:t>𝑙</m:t>
                                 </m:r>
                               </m:e>
                               <m:sub>
                                 <m:r>
-                                  <a:rPr lang="en-US" sz="2400" i="1"/>
+                                  <a:rPr lang="en-US" sz="2400" i="1">
+                                    <a:latin typeface="Cambria Math" panose="02040503050406030204" pitchFamily="18" charset="0"/>
+                                  </a:rPr>
                                   <m:t>𝑡𝑎𝑟𝑔𝑒𝑡</m:t>
                                 </m:r>
                               </m:sub>
@@ -18006,13 +18309,17 @@
                       </m:e>
                       <m:sup>
                         <m:r>
-                          <a:rPr lang="en-US" sz="2400"/>
+                          <a:rPr lang="en-US" sz="2400">
+                            <a:latin typeface="Cambria Math" panose="02040503050406030204" pitchFamily="18" charset="0"/>
+                          </a:rPr>
                           <m:t>2</m:t>
                         </m:r>
                       </m:sup>
                     </m:sSup>
                     <m:r>
-                      <a:rPr lang="en-US" sz="2400"/>
+                      <a:rPr lang="en-US" sz="2400">
+                        <a:latin typeface="Cambria Math" panose="02040503050406030204" pitchFamily="18" charset="0"/>
+                      </a:rPr>
                       <m:t>+2</m:t>
                     </m:r>
                     <m:r>
@@ -18022,69 +18329,93 @@
                       <m:t>0</m:t>
                     </m:r>
                     <m:r>
-                      <a:rPr lang="en-US" sz="2400"/>
+                      <a:rPr lang="en-US" sz="2400">
+                        <a:latin typeface="Cambria Math" panose="02040503050406030204" pitchFamily="18" charset="0"/>
+                      </a:rPr>
                       <m:t>×</m:t>
                     </m:r>
                     <m:sSup>
                       <m:sSupPr>
                         <m:ctrlPr>
-                          <a:rPr lang="en-US" sz="2400" i="1" smtClean="0"/>
+                          <a:rPr lang="en-US" sz="2400" i="1" smtClean="0">
+                            <a:latin typeface="Cambria Math" panose="02040503050406030204" pitchFamily="18" charset="0"/>
+                          </a:rPr>
                         </m:ctrlPr>
                       </m:sSupPr>
                       <m:e>
                         <m:d>
                           <m:dPr>
                             <m:ctrlPr>
-                              <a:rPr lang="en-US" sz="2400" i="1"/>
+                              <a:rPr lang="en-US" sz="2400" i="1">
+                                <a:latin typeface="Cambria Math" panose="02040503050406030204" pitchFamily="18" charset="0"/>
+                              </a:rPr>
                             </m:ctrlPr>
                           </m:dPr>
                           <m:e>
                             <m:r>
-                              <a:rPr lang="en-US" sz="2400" i="1"/>
+                              <a:rPr lang="en-US" sz="2400" i="1">
+                                <a:latin typeface="Cambria Math" panose="02040503050406030204" pitchFamily="18" charset="0"/>
+                              </a:rPr>
                               <m:t>𝑝𝑟𝑜𝑡𝑒𝑖</m:t>
                             </m:r>
                             <m:sSub>
                               <m:sSubPr>
                                 <m:ctrlPr>
-                                  <a:rPr lang="en-US" sz="2400" i="1"/>
+                                  <a:rPr lang="en-US" sz="2400" i="1">
+                                    <a:latin typeface="Cambria Math" panose="02040503050406030204" pitchFamily="18" charset="0"/>
+                                  </a:rPr>
                                 </m:ctrlPr>
                               </m:sSubPr>
                               <m:e>
                                 <m:r>
-                                  <a:rPr lang="en-US" sz="2400" i="1"/>
+                                  <a:rPr lang="en-US" sz="2400" i="1">
+                                    <a:latin typeface="Cambria Math" panose="02040503050406030204" pitchFamily="18" charset="0"/>
+                                  </a:rPr>
                                   <m:t>𝑛</m:t>
                                 </m:r>
                               </m:e>
                               <m:sub>
                                 <m:r>
-                                  <a:rPr lang="en-US" sz="2400" i="1"/>
+                                  <a:rPr lang="en-US" sz="2400" i="1">
+                                    <a:latin typeface="Cambria Math" panose="02040503050406030204" pitchFamily="18" charset="0"/>
+                                  </a:rPr>
                                   <m:t>𝑐𝑢𝑟𝑟𝑒𝑛𝑡</m:t>
                                 </m:r>
                               </m:sub>
                             </m:sSub>
                             <m:r>
-                              <a:rPr lang="en-US" sz="2400"/>
+                              <a:rPr lang="en-US" sz="2400">
+                                <a:latin typeface="Cambria Math" panose="02040503050406030204" pitchFamily="18" charset="0"/>
+                              </a:rPr>
                               <m:t>−</m:t>
                             </m:r>
                             <m:r>
-                              <a:rPr lang="en-US" sz="2400" i="1"/>
+                              <a:rPr lang="en-US" sz="2400" i="1">
+                                <a:latin typeface="Cambria Math" panose="02040503050406030204" pitchFamily="18" charset="0"/>
+                              </a:rPr>
                               <m:t>𝑝𝑟𝑜𝑡𝑒𝑖</m:t>
                             </m:r>
                             <m:sSub>
                               <m:sSubPr>
                                 <m:ctrlPr>
-                                  <a:rPr lang="en-US" sz="2400" i="1"/>
+                                  <a:rPr lang="en-US" sz="2400" i="1">
+                                    <a:latin typeface="Cambria Math" panose="02040503050406030204" pitchFamily="18" charset="0"/>
+                                  </a:rPr>
                                 </m:ctrlPr>
                               </m:sSubPr>
                               <m:e>
                                 <m:r>
-                                  <a:rPr lang="en-US" sz="2400" i="1"/>
+                                  <a:rPr lang="en-US" sz="2400" i="1">
+                                    <a:latin typeface="Cambria Math" panose="02040503050406030204" pitchFamily="18" charset="0"/>
+                                  </a:rPr>
                                   <m:t>𝑛</m:t>
                                 </m:r>
                               </m:e>
                               <m:sub>
                                 <m:r>
-                                  <a:rPr lang="en-US" sz="2400" i="1"/>
+                                  <a:rPr lang="en-US" sz="2400" i="1">
+                                    <a:latin typeface="Cambria Math" panose="02040503050406030204" pitchFamily="18" charset="0"/>
+                                  </a:rPr>
                                   <m:t>𝑡𝑎𝑟𝑔𝑒𝑡</m:t>
                                 </m:r>
                               </m:sub>
@@ -18094,7 +18425,9 @@
                       </m:e>
                       <m:sup>
                         <m:r>
-                          <a:rPr lang="en-US" sz="2400"/>
+                          <a:rPr lang="en-US" sz="2400">
+                            <a:latin typeface="Cambria Math" panose="02040503050406030204" pitchFamily="18" charset="0"/>
+                          </a:rPr>
                           <m:t>2</m:t>
                         </m:r>
                       </m:sup>
@@ -18106,7 +18439,7 @@
             </p:txBody>
           </p:sp>
         </mc:Choice>
-        <mc:Fallback>
+        <mc:Fallback xmlns="">
           <p:sp>
             <p:nvSpPr>
               <p:cNvPr id="18" name="Content Placeholder 3">
@@ -18131,7 +18464,7 @@
               <a:blipFill>
                 <a:blip r:embed="rId2"/>
                 <a:stretch>
-                  <a:fillRect l="-1942" t="-2381"/>
+                  <a:fillRect l="-1942" t="-2381" r="-1845"/>
                 </a:stretch>
               </a:blipFill>
             </p:spPr>
@@ -18214,6 +18547,321 @@
   <p:cSld>
     <p:spTree>
       <p:nvGrpSpPr>
+        <p:cNvPr id="1" name="">
+          <a:extLst>
+            <a:ext uri="{FF2B5EF4-FFF2-40B4-BE49-F238E27FC236}">
+              <a16:creationId xmlns:a16="http://schemas.microsoft.com/office/drawing/2014/main" id="{BE97D91D-10A8-2D6F-C2B8-83CB08CD73AE}"/>
+            </a:ext>
+          </a:extLst>
+        </p:cNvPr>
+        <p:cNvGrpSpPr/>
+        <p:nvPr/>
+      </p:nvGrpSpPr>
+      <p:grpSpPr>
+        <a:xfrm>
+          <a:off x="0" y="0"/>
+          <a:ext cx="0" cy="0"/>
+          <a:chOff x="0" y="0"/>
+          <a:chExt cx="0" cy="0"/>
+        </a:xfrm>
+      </p:grpSpPr>
+      <p:sp>
+        <p:nvSpPr>
+          <p:cNvPr id="2" name="Title 1">
+            <a:extLst>
+              <a:ext uri="{FF2B5EF4-FFF2-40B4-BE49-F238E27FC236}">
+                <a16:creationId xmlns:a16="http://schemas.microsoft.com/office/drawing/2014/main" id="{D060FE88-8F30-6B60-278D-C9270BAB19DA}"/>
+              </a:ext>
+            </a:extLst>
+          </p:cNvPr>
+          <p:cNvSpPr>
+            <a:spLocks noGrp="1"/>
+          </p:cNvSpPr>
+          <p:nvPr>
+            <p:ph type="title"/>
+          </p:nvPr>
+        </p:nvSpPr>
+        <p:spPr>
+          <a:xfrm>
+            <a:off x="1536192" y="589834"/>
+            <a:ext cx="8878824" cy="1069848"/>
+          </a:xfrm>
+        </p:spPr>
+        <p:txBody>
+          <a:bodyPr anchor="b">
+            <a:normAutofit/>
+          </a:bodyPr>
+          <a:lstStyle/>
+          <a:p>
+            <a:r>
+              <a:rPr lang="en-US" dirty="0"/>
+              <a:t>DATABASE STRATEGY</a:t>
+            </a:r>
+          </a:p>
+        </p:txBody>
+      </p:sp>
+      <p:sp>
+        <p:nvSpPr>
+          <p:cNvPr id="23" name="Text Placeholder 2">
+            <a:extLst>
+              <a:ext uri="{FF2B5EF4-FFF2-40B4-BE49-F238E27FC236}">
+                <a16:creationId xmlns:a16="http://schemas.microsoft.com/office/drawing/2014/main" id="{D6CF2935-44D5-36A0-F6C9-9F28FC0B54C8}"/>
+              </a:ext>
+            </a:extLst>
+          </p:cNvPr>
+          <p:cNvSpPr>
+            <a:spLocks noGrp="1"/>
+          </p:cNvSpPr>
+          <p:nvPr>
+            <p:ph type="body" idx="1"/>
+          </p:nvPr>
+        </p:nvSpPr>
+        <p:spPr>
+          <a:xfrm>
+            <a:off x="1536192" y="2116455"/>
+            <a:ext cx="2953512" cy="493776"/>
+          </a:xfrm>
+        </p:spPr>
+        <p:txBody>
+          <a:bodyPr/>
+          <a:lstStyle/>
+          <a:p>
+            <a:r>
+              <a:rPr lang="en-US" dirty="0" err="1"/>
+              <a:t>AuthServiceERD</a:t>
+            </a:r>
+            <a:endParaRPr lang="en-US" dirty="0"/>
+          </a:p>
+        </p:txBody>
+      </p:sp>
+      <p:pic>
+        <p:nvPicPr>
+          <p:cNvPr id="4" name="Content Placeholder 3">
+            <a:extLst>
+              <a:ext uri="{FF2B5EF4-FFF2-40B4-BE49-F238E27FC236}">
+                <a16:creationId xmlns:a16="http://schemas.microsoft.com/office/drawing/2014/main" id="{0C147B4B-C2FA-F381-711D-15E753372434}"/>
+              </a:ext>
+            </a:extLst>
+          </p:cNvPr>
+          <p:cNvPicPr>
+            <a:picLocks noGrp="1" noChangeAspect="1"/>
+          </p:cNvPicPr>
+          <p:nvPr>
+            <p:ph sz="half" idx="2"/>
+          </p:nvPr>
+        </p:nvPicPr>
+        <p:blipFill>
+          <a:blip r:embed="rId2"/>
+          <a:stretch>
+            <a:fillRect/>
+          </a:stretch>
+        </p:blipFill>
+        <p:spPr>
+          <a:xfrm>
+            <a:off x="1363494" y="2743200"/>
+            <a:ext cx="3126210" cy="3181350"/>
+          </a:xfrm>
+          <a:prstGeom prst="rect">
+            <a:avLst/>
+          </a:prstGeom>
+        </p:spPr>
+      </p:pic>
+      <p:sp>
+        <p:nvSpPr>
+          <p:cNvPr id="27" name="Text Placeholder 4">
+            <a:extLst>
+              <a:ext uri="{FF2B5EF4-FFF2-40B4-BE49-F238E27FC236}">
+                <a16:creationId xmlns:a16="http://schemas.microsoft.com/office/drawing/2014/main" id="{B5CC0A4D-699B-1D4F-136F-D849432E2E4E}"/>
+              </a:ext>
+            </a:extLst>
+          </p:cNvPr>
+          <p:cNvSpPr>
+            <a:spLocks noGrp="1"/>
+          </p:cNvSpPr>
+          <p:nvPr>
+            <p:ph type="body" sz="quarter" idx="3"/>
+          </p:nvPr>
+        </p:nvSpPr>
+        <p:spPr>
+          <a:xfrm>
+            <a:off x="4754880" y="2130171"/>
+            <a:ext cx="2953512" cy="493776"/>
+          </a:xfrm>
+        </p:spPr>
+        <p:txBody>
+          <a:bodyPr/>
+          <a:lstStyle/>
+          <a:p>
+            <a:r>
+              <a:rPr lang="en-US" dirty="0" err="1"/>
+              <a:t>DailyPlanServiceERD</a:t>
+            </a:r>
+            <a:endParaRPr lang="en-US" dirty="0"/>
+          </a:p>
+        </p:txBody>
+      </p:sp>
+      <p:pic>
+        <p:nvPicPr>
+          <p:cNvPr id="7" name="Content Placeholder 6">
+            <a:extLst>
+              <a:ext uri="{FF2B5EF4-FFF2-40B4-BE49-F238E27FC236}">
+                <a16:creationId xmlns:a16="http://schemas.microsoft.com/office/drawing/2014/main" id="{F111979D-30BB-3C87-2992-CFC8D9769167}"/>
+              </a:ext>
+            </a:extLst>
+          </p:cNvPr>
+          <p:cNvPicPr>
+            <a:picLocks noGrp="1" noChangeAspect="1"/>
+          </p:cNvPicPr>
+          <p:nvPr>
+            <p:ph sz="quarter" idx="4"/>
+          </p:nvPr>
+        </p:nvPicPr>
+        <p:blipFill>
+          <a:blip r:embed="rId3"/>
+          <a:stretch>
+            <a:fillRect/>
+          </a:stretch>
+        </p:blipFill>
+        <p:spPr>
+          <a:xfrm>
+            <a:off x="4701045" y="2743200"/>
+            <a:ext cx="3037560" cy="3181350"/>
+          </a:xfrm>
+          <a:prstGeom prst="rect">
+            <a:avLst/>
+          </a:prstGeom>
+        </p:spPr>
+      </p:pic>
+      <p:sp>
+        <p:nvSpPr>
+          <p:cNvPr id="6" name="Slide Number Placeholder 5">
+            <a:extLst>
+              <a:ext uri="{FF2B5EF4-FFF2-40B4-BE49-F238E27FC236}">
+                <a16:creationId xmlns:a16="http://schemas.microsoft.com/office/drawing/2014/main" id="{DA7FBF26-0655-5336-7414-2AAB01063AE9}"/>
+              </a:ext>
+            </a:extLst>
+          </p:cNvPr>
+          <p:cNvSpPr>
+            <a:spLocks noGrp="1"/>
+          </p:cNvSpPr>
+          <p:nvPr>
+            <p:ph type="sldNum" sz="quarter" idx="12"/>
+          </p:nvPr>
+        </p:nvSpPr>
+        <p:spPr>
+          <a:xfrm>
+            <a:off x="329184" y="411480"/>
+            <a:ext cx="521208" cy="310896"/>
+          </a:xfrm>
+        </p:spPr>
+        <p:txBody>
+          <a:bodyPr anchor="ctr">
+            <a:normAutofit/>
+          </a:bodyPr>
+          <a:lstStyle/>
+          <a:p>
+            <a:pPr>
+              <a:spcAft>
+                <a:spcPts val="600"/>
+              </a:spcAft>
+            </a:pPr>
+            <a:fld id="{294A09A9-5501-47C1-A89A-A340965A2BE2}" type="slidenum">
+              <a:rPr lang="en-US" smtClean="0"/>
+              <a:pPr>
+                <a:spcAft>
+                  <a:spcPts val="600"/>
+                </a:spcAft>
+              </a:pPr>
+              <a:t>6</a:t>
+            </a:fld>
+            <a:endParaRPr lang="en-US"/>
+          </a:p>
+        </p:txBody>
+      </p:sp>
+      <p:sp>
+        <p:nvSpPr>
+          <p:cNvPr id="33" name="Text Placeholder 8">
+            <a:extLst>
+              <a:ext uri="{FF2B5EF4-FFF2-40B4-BE49-F238E27FC236}">
+                <a16:creationId xmlns:a16="http://schemas.microsoft.com/office/drawing/2014/main" id="{36DD8CBC-56C2-9A68-2752-95DD2A772C3B}"/>
+              </a:ext>
+            </a:extLst>
+          </p:cNvPr>
+          <p:cNvSpPr>
+            <a:spLocks noGrp="1"/>
+          </p:cNvSpPr>
+          <p:nvPr>
+            <p:ph type="body" sz="quarter" idx="13"/>
+          </p:nvPr>
+        </p:nvSpPr>
+        <p:spPr>
+          <a:xfrm>
+            <a:off x="7973568" y="2130171"/>
+            <a:ext cx="2953512" cy="493776"/>
+          </a:xfrm>
+        </p:spPr>
+        <p:txBody>
+          <a:bodyPr/>
+          <a:lstStyle/>
+          <a:p>
+            <a:r>
+              <a:rPr lang="en-US" dirty="0" err="1"/>
+              <a:t>OptimizerServiceERD</a:t>
+            </a:r>
+            <a:endParaRPr lang="en-US" dirty="0"/>
+          </a:p>
+        </p:txBody>
+      </p:sp>
+      <p:pic>
+        <p:nvPicPr>
+          <p:cNvPr id="9" name="Content Placeholder 8">
+            <a:extLst>
+              <a:ext uri="{FF2B5EF4-FFF2-40B4-BE49-F238E27FC236}">
+                <a16:creationId xmlns:a16="http://schemas.microsoft.com/office/drawing/2014/main" id="{764ED312-D17B-34F9-0B4D-99CE673E4A66}"/>
+              </a:ext>
+            </a:extLst>
+          </p:cNvPr>
+          <p:cNvPicPr>
+            <a:picLocks noGrp="1" noChangeAspect="1"/>
+          </p:cNvPicPr>
+          <p:nvPr>
+            <p:ph sz="quarter" idx="14"/>
+          </p:nvPr>
+        </p:nvPicPr>
+        <p:blipFill>
+          <a:blip r:embed="rId4"/>
+          <a:stretch>
+            <a:fillRect/>
+          </a:stretch>
+        </p:blipFill>
+        <p:spPr>
+          <a:xfrm>
+            <a:off x="7949946" y="3094436"/>
+            <a:ext cx="3823202" cy="2582464"/>
+          </a:xfrm>
+          <a:prstGeom prst="rect">
+            <a:avLst/>
+          </a:prstGeom>
+        </p:spPr>
+      </p:pic>
+    </p:spTree>
+    <p:extLst>
+      <p:ext uri="{BB962C8B-B14F-4D97-AF65-F5344CB8AC3E}">
+        <p14:creationId xmlns:p14="http://schemas.microsoft.com/office/powerpoint/2010/main" val="835952809"/>
+      </p:ext>
+    </p:extLst>
+  </p:cSld>
+  <p:clrMapOvr>
+    <a:masterClrMapping/>
+  </p:clrMapOvr>
+</p:sld>
+</file>
+
+<file path=ppt/slides/slide7.xml><?xml version="1.0" encoding="utf-8"?>
+<p:sld xmlns:a="http://schemas.openxmlformats.org/drawingml/2006/main" xmlns:r="http://schemas.openxmlformats.org/officeDocument/2006/relationships" xmlns:p="http://schemas.openxmlformats.org/presentationml/2006/main">
+  <p:cSld>
+    <p:spTree>
+      <p:nvGrpSpPr>
         <p:cNvPr id="1" name=""/>
         <p:cNvGrpSpPr/>
         <p:nvPr/>
@@ -18249,7 +18897,7 @@
           <a:p>
             <a:r>
               <a:rPr lang="en-US" dirty="0"/>
-              <a:t>Key implementations</a:t>
+              <a:t>other implementations</a:t>
             </a:r>
           </a:p>
         </p:txBody>
@@ -18277,7 +18925,7 @@
           <a:p>
             <a:fld id="{294A09A9-5501-47C1-A89A-A340965A2BE2}" type="slidenum">
               <a:rPr lang="en-US" smtClean="0"/>
-              <a:t>6</a:t>
+              <a:t>7</a:t>
             </a:fld>
             <a:endParaRPr lang="en-US" dirty="0"/>
           </a:p>
@@ -18311,11 +18959,8 @@
           <a:p>
             <a:r>
               <a:rPr lang="en-US" sz="2000" dirty="0"/>
-              <a:t>Microservices architecture</a:t>
+              <a:t>Shared Project</a:t>
             </a:r>
-          </a:p>
-          <a:p>
-            <a:endParaRPr lang="en-US" sz="2000" dirty="0"/>
           </a:p>
         </p:txBody>
       </p:sp>
@@ -18346,16 +18991,9 @@
           <a:lstStyle/>
           <a:p>
             <a:r>
-              <a:rPr lang="it-IT" sz="1400" dirty="0"/>
-              <a:t>Utilizatorii își pot crea conturi, autentifica, și accesa funcționalitățile personalizate ale aplicației.</a:t>
+              <a:rPr lang="en-US" sz="1400" dirty="0"/>
+              <a:t>Common authentication configuration, global exception middleware and shared DTOs extracted into a dedicated project referenced by both .NET services</a:t>
             </a:r>
-            <a:endParaRPr lang="en-US" sz="1400" dirty="0"/>
-          </a:p>
-          <a:p>
-            <a:endParaRPr lang="en-US" sz="1400" dirty="0"/>
-          </a:p>
-          <a:p>
-            <a:endParaRPr lang="en-US" sz="1400" dirty="0"/>
           </a:p>
         </p:txBody>
       </p:sp>
@@ -18567,9 +19205,10 @@
           </a:lstStyle>
           <a:p>
             <a:r>
-              <a:rPr lang="en-US" sz="2000" dirty="0"/>
-              <a:t>Shared Project</a:t>
+              <a:rPr lang="en-US" sz="2000" dirty="0" err="1"/>
+              <a:t>AutoMapper</a:t>
             </a:r>
+            <a:endParaRPr lang="en-US" sz="2000" dirty="0"/>
           </a:p>
         </p:txBody>
       </p:sp>
@@ -18781,132 +19420,8 @@
           </a:lstStyle>
           <a:p>
             <a:r>
-              <a:rPr lang="en-US" sz="1400" dirty="0" err="1"/>
-              <a:t>Utilizatorii</a:t>
-            </a:r>
-            <a:r>
               <a:rPr lang="en-US" sz="1400" dirty="0"/>
-              <a:t> pot </a:t>
-            </a:r>
-            <a:r>
-              <a:rPr lang="en-US" sz="1400" dirty="0" err="1"/>
-              <a:t>crea</a:t>
-            </a:r>
-            <a:r>
-              <a:rPr lang="en-US" sz="1400" dirty="0"/>
-              <a:t> </a:t>
-            </a:r>
-            <a:r>
-              <a:rPr lang="en-US" sz="1400" dirty="0" err="1"/>
-              <a:t>și</a:t>
-            </a:r>
-            <a:r>
-              <a:rPr lang="en-US" sz="1400" dirty="0"/>
-              <a:t> </a:t>
-            </a:r>
-            <a:r>
-              <a:rPr lang="en-US" sz="1400" dirty="0" err="1"/>
-              <a:t>gestiona</a:t>
-            </a:r>
-            <a:r>
-              <a:rPr lang="en-US" sz="1400" dirty="0"/>
-              <a:t> workout split-</a:t>
-            </a:r>
-            <a:r>
-              <a:rPr lang="en-US" sz="1400" dirty="0" err="1"/>
-              <a:t>uri</a:t>
-            </a:r>
-            <a:r>
-              <a:rPr lang="en-US" sz="1400" dirty="0"/>
-              <a:t> </a:t>
-            </a:r>
-            <a:r>
-              <a:rPr lang="en-US" sz="1400" dirty="0" err="1"/>
-              <a:t>și</a:t>
-            </a:r>
-            <a:r>
-              <a:rPr lang="en-US" sz="1400" dirty="0"/>
-              <a:t> workout-</a:t>
-            </a:r>
-            <a:r>
-              <a:rPr lang="en-US" sz="1400" dirty="0" err="1"/>
-              <a:t>uri</a:t>
-            </a:r>
-            <a:r>
-              <a:rPr lang="en-US" sz="1400" dirty="0"/>
-              <a:t>, </a:t>
-            </a:r>
-            <a:r>
-              <a:rPr lang="en-US" sz="1400" dirty="0" err="1"/>
-              <a:t>adăuga</a:t>
-            </a:r>
-            <a:r>
-              <a:rPr lang="en-US" sz="1400" dirty="0"/>
-              <a:t> </a:t>
-            </a:r>
-            <a:r>
-              <a:rPr lang="en-US" sz="1400" dirty="0" err="1"/>
-              <a:t>și</a:t>
-            </a:r>
-            <a:r>
-              <a:rPr lang="en-US" sz="1400" dirty="0"/>
-              <a:t> </a:t>
-            </a:r>
-            <a:r>
-              <a:rPr lang="en-US" sz="1400" dirty="0" err="1"/>
-              <a:t>șterge</a:t>
-            </a:r>
-            <a:r>
-              <a:rPr lang="en-US" sz="1400" dirty="0"/>
-              <a:t> </a:t>
-            </a:r>
-            <a:r>
-              <a:rPr lang="en-US" sz="1400" dirty="0" err="1"/>
-              <a:t>exerciții</a:t>
-            </a:r>
-            <a:r>
-              <a:rPr lang="en-US" sz="1400" dirty="0"/>
-              <a:t>, </a:t>
-            </a:r>
-            <a:r>
-              <a:rPr lang="en-US" sz="1400" dirty="0" err="1"/>
-              <a:t>și</a:t>
-            </a:r>
-            <a:r>
-              <a:rPr lang="en-US" sz="1400" dirty="0"/>
-              <a:t> </a:t>
-            </a:r>
-            <a:r>
-              <a:rPr lang="en-US" sz="1400" dirty="0" err="1"/>
-              <a:t>marca</a:t>
-            </a:r>
-            <a:r>
-              <a:rPr lang="en-US" sz="1400" dirty="0"/>
-              <a:t> </a:t>
-            </a:r>
-            <a:r>
-              <a:rPr lang="en-US" sz="1400" dirty="0" err="1"/>
-              <a:t>antrenamentele</a:t>
-            </a:r>
-            <a:r>
-              <a:rPr lang="en-US" sz="1400" dirty="0"/>
-              <a:t> ca </a:t>
-            </a:r>
-            <a:r>
-              <a:rPr lang="en-US" sz="1400" dirty="0" err="1"/>
-              <a:t>fiind</a:t>
-            </a:r>
-            <a:r>
-              <a:rPr lang="en-US" sz="1400" dirty="0"/>
-              <a:t> </a:t>
-            </a:r>
-            <a:r>
-              <a:rPr lang="en-US" sz="1400" dirty="0" err="1"/>
-              <a:t>finalizate</a:t>
-            </a:r>
-            <a:r>
-              <a:rPr lang="en-US" sz="1400" dirty="0"/>
-              <a:t>.</a:t>
+              <a:t>Domain model to DTO mapping configured per service, reducing boilerplate transformation code</a:t>
             </a:r>
           </a:p>
         </p:txBody>
@@ -19119,9 +19634,10 @@
           </a:lstStyle>
           <a:p>
             <a:r>
-              <a:rPr lang="en-US" sz="2000" dirty="0"/>
-              <a:t>Nutrition snapshot</a:t>
+              <a:rPr lang="en-US" sz="2000" dirty="0" err="1"/>
+              <a:t>Serilog</a:t>
             </a:r>
+            <a:endParaRPr lang="en-US" sz="2000" dirty="0"/>
           </a:p>
         </p:txBody>
       </p:sp>
@@ -19333,100 +19849,22 @@
           </a:lstStyle>
           <a:p>
             <a:r>
+              <a:rPr lang="en-US" sz="1400" dirty="0"/>
+              <a:t>Structured logging sink writing directly to Azure SQL</a:t>
+            </a:r>
+          </a:p>
+          <a:p>
+            <a:r>
+              <a:rPr lang="en-US" sz="1400" dirty="0"/>
+              <a:t>Logs persist in the </a:t>
+            </a:r>
+            <a:r>
               <a:rPr lang="en-US" sz="1400" dirty="0" err="1"/>
-              <a:t>Utilizatorii</a:t>
+              <a:t>ApplicationLogs</a:t>
             </a:r>
             <a:r>
               <a:rPr lang="en-US" sz="1400" dirty="0"/>
-              <a:t> pot selecta </a:t>
-            </a:r>
-            <a:r>
-              <a:rPr lang="en-US" sz="1400" dirty="0" err="1"/>
-              <a:t>grupuri</a:t>
-            </a:r>
-            <a:r>
-              <a:rPr lang="en-US" sz="1400" dirty="0"/>
-              <a:t> </a:t>
-            </a:r>
-            <a:r>
-              <a:rPr lang="en-US" sz="1400" dirty="0" err="1"/>
-              <a:t>musculare</a:t>
-            </a:r>
-            <a:r>
-              <a:rPr lang="en-US" sz="1400" dirty="0"/>
-              <a:t> </a:t>
-            </a:r>
-            <a:r>
-              <a:rPr lang="en-US" sz="1400" dirty="0" err="1"/>
-              <a:t>pentru</a:t>
-            </a:r>
-            <a:r>
-              <a:rPr lang="en-US" sz="1400" dirty="0"/>
-              <a:t> a </a:t>
-            </a:r>
-            <a:r>
-              <a:rPr lang="en-US" sz="1400" dirty="0" err="1"/>
-              <a:t>vedea</a:t>
-            </a:r>
-            <a:r>
-              <a:rPr lang="en-US" sz="1400" dirty="0"/>
-              <a:t> </a:t>
-            </a:r>
-            <a:r>
-              <a:rPr lang="en-US" sz="1400" dirty="0" err="1"/>
-              <a:t>exercițiile</a:t>
-            </a:r>
-            <a:r>
-              <a:rPr lang="en-US" sz="1400" dirty="0"/>
-              <a:t> </a:t>
-            </a:r>
-            <a:r>
-              <a:rPr lang="en-US" sz="1400" dirty="0" err="1"/>
-              <a:t>asociate</a:t>
-            </a:r>
-            <a:r>
-              <a:rPr lang="en-US" sz="1400" dirty="0"/>
-              <a:t> </a:t>
-            </a:r>
-            <a:r>
-              <a:rPr lang="en-US" sz="1400" dirty="0" err="1"/>
-              <a:t>și</a:t>
-            </a:r>
-            <a:r>
-              <a:rPr lang="en-US" sz="1400" dirty="0"/>
-              <a:t> a-</a:t>
-            </a:r>
-            <a:r>
-              <a:rPr lang="en-US" sz="1400" dirty="0" err="1"/>
-              <a:t>și</a:t>
-            </a:r>
-            <a:r>
-              <a:rPr lang="en-US" sz="1400" dirty="0"/>
-              <a:t> </a:t>
-            </a:r>
-            <a:r>
-              <a:rPr lang="en-US" sz="1400" dirty="0" err="1"/>
-              <a:t>crea</a:t>
-            </a:r>
-            <a:r>
-              <a:rPr lang="en-US" sz="1400" dirty="0"/>
-              <a:t> </a:t>
-            </a:r>
-            <a:r>
-              <a:rPr lang="en-US" sz="1400" dirty="0" err="1"/>
-              <a:t>antrenamente</a:t>
-            </a:r>
-            <a:r>
-              <a:rPr lang="en-US" sz="1400" dirty="0"/>
-              <a:t> </a:t>
-            </a:r>
-            <a:r>
-              <a:rPr lang="en-US" sz="1400" dirty="0" err="1"/>
-              <a:t>eficiente</a:t>
-            </a:r>
-            <a:r>
-              <a:rPr lang="en-US" sz="1400" dirty="0"/>
-              <a:t>.</a:t>
+              <a:t> table</a:t>
             </a:r>
           </a:p>
         </p:txBody>
@@ -19640,7 +20078,7 @@
           <a:p>
             <a:r>
               <a:rPr lang="en-US" sz="2000" dirty="0"/>
-              <a:t>Embedded SQLite</a:t>
+              <a:t>Entity Framework Core</a:t>
             </a:r>
           </a:p>
         </p:txBody>
@@ -19853,124 +20291,8 @@
           </a:lstStyle>
           <a:p>
             <a:r>
-              <a:rPr lang="en-US" sz="1400" dirty="0" err="1"/>
-              <a:t>Utilizatorii</a:t>
-            </a:r>
-            <a:r>
               <a:rPr lang="en-US" sz="1400" dirty="0"/>
-              <a:t> pot </a:t>
-            </a:r>
-            <a:r>
-              <a:rPr lang="en-US" sz="1400" dirty="0" err="1"/>
-              <a:t>vizualiza</a:t>
-            </a:r>
-            <a:r>
-              <a:rPr lang="en-US" sz="1400" dirty="0"/>
-              <a:t> </a:t>
-            </a:r>
-            <a:r>
-              <a:rPr lang="en-US" sz="1400" dirty="0" err="1"/>
-              <a:t>rapoarte</a:t>
-            </a:r>
-            <a:r>
-              <a:rPr lang="en-US" sz="1400" dirty="0"/>
-              <a:t> </a:t>
-            </a:r>
-            <a:r>
-              <a:rPr lang="en-US" sz="1400" dirty="0" err="1"/>
-              <a:t>detaliate</a:t>
-            </a:r>
-            <a:r>
-              <a:rPr lang="en-US" sz="1400" dirty="0"/>
-              <a:t> </a:t>
-            </a:r>
-            <a:r>
-              <a:rPr lang="en-US" sz="1400" dirty="0" err="1"/>
-              <a:t>și</a:t>
-            </a:r>
-            <a:r>
-              <a:rPr lang="en-US" sz="1400" dirty="0"/>
-              <a:t> </a:t>
-            </a:r>
-            <a:r>
-              <a:rPr lang="en-US" sz="1400" dirty="0" err="1"/>
-              <a:t>grafice</a:t>
-            </a:r>
-            <a:r>
-              <a:rPr lang="en-US" sz="1400" dirty="0"/>
-              <a:t> de </a:t>
-            </a:r>
-            <a:r>
-              <a:rPr lang="en-US" sz="1400" dirty="0" err="1"/>
-              <a:t>progres</a:t>
-            </a:r>
-            <a:r>
-              <a:rPr lang="en-US" sz="1400" dirty="0"/>
-              <a:t> </a:t>
-            </a:r>
-            <a:r>
-              <a:rPr lang="en-US" sz="1400" dirty="0" err="1"/>
-              <a:t>pentru</a:t>
-            </a:r>
-            <a:r>
-              <a:rPr lang="en-US" sz="1400" dirty="0"/>
-              <a:t> </a:t>
-            </a:r>
-            <a:r>
-              <a:rPr lang="en-US" sz="1400" dirty="0" err="1"/>
-              <a:t>exercițiile</a:t>
-            </a:r>
-            <a:r>
-              <a:rPr lang="en-US" sz="1400" dirty="0"/>
-              <a:t> </a:t>
-            </a:r>
-            <a:r>
-              <a:rPr lang="en-US" sz="1400" dirty="0" err="1"/>
-              <a:t>efectuate</a:t>
-            </a:r>
-            <a:r>
-              <a:rPr lang="en-US" sz="1400" dirty="0"/>
-              <a:t>, </a:t>
-            </a:r>
-            <a:r>
-              <a:rPr lang="en-US" sz="1400" dirty="0" err="1"/>
-              <a:t>folosind</a:t>
-            </a:r>
-            <a:r>
-              <a:rPr lang="en-US" sz="1400" dirty="0"/>
-              <a:t> un control de calendar </a:t>
-            </a:r>
-            <a:r>
-              <a:rPr lang="en-US" sz="1400" dirty="0" err="1"/>
-              <a:t>pentru</a:t>
-            </a:r>
-            <a:r>
-              <a:rPr lang="en-US" sz="1400" dirty="0"/>
-              <a:t> </a:t>
-            </a:r>
-            <a:r>
-              <a:rPr lang="en-US" sz="1400" dirty="0" err="1"/>
-              <a:t>selectarea</a:t>
-            </a:r>
-            <a:r>
-              <a:rPr lang="en-US" sz="1400" dirty="0"/>
-              <a:t> </a:t>
-            </a:r>
-            <a:r>
-              <a:rPr lang="en-US" sz="1400" dirty="0" err="1"/>
-              <a:t>perioadei</a:t>
-            </a:r>
-            <a:r>
-              <a:rPr lang="en-US" sz="1400" dirty="0"/>
-              <a:t> de </a:t>
-            </a:r>
-            <a:r>
-              <a:rPr lang="en-US" sz="1400" dirty="0" err="1"/>
-              <a:t>interes</a:t>
-            </a:r>
-            <a:r>
-              <a:rPr lang="en-US" sz="1400" dirty="0"/>
-              <a:t>.</a:t>
+              <a:t>ORM used for database interactions across both .NET services, with code-first migrations managing schema evolution</a:t>
             </a:r>
           </a:p>
         </p:txBody>
@@ -19988,7 +20310,7 @@
 </p:sld>
 </file>
 
-<file path=ppt/slides/slide7.xml><?xml version="1.0" encoding="utf-8"?>
+<file path=ppt/slides/slide8.xml><?xml version="1.0" encoding="utf-8"?>
 <p:sld xmlns:a="http://schemas.openxmlformats.org/drawingml/2006/main" xmlns:r="http://schemas.openxmlformats.org/officeDocument/2006/relationships" xmlns:p="http://schemas.openxmlformats.org/presentationml/2006/main">
   <p:cSld>
     <p:spTree>
@@ -20029,12 +20351,14 @@
         </p:nvSpPr>
         <p:spPr>
           <a:xfrm>
-            <a:off x="2147887" y="667512"/>
-            <a:ext cx="7896225" cy="657225"/>
-          </a:xfrm>
-        </p:spPr>
-        <p:txBody>
-          <a:bodyPr/>
+            <a:off x="1545336" y="566928"/>
+            <a:ext cx="8878824" cy="1069848"/>
+          </a:xfrm>
+        </p:spPr>
+        <p:txBody>
+          <a:bodyPr anchor="b">
+            <a:normAutofit/>
+          </a:bodyPr>
           <a:lstStyle/>
           <a:p>
             <a:r>
@@ -20046,10 +20370,10 @@
       </p:sp>
       <p:sp>
         <p:nvSpPr>
-          <p:cNvPr id="3" name="Picture Placeholder 2">
-            <a:extLst>
-              <a:ext uri="{FF2B5EF4-FFF2-40B4-BE49-F238E27FC236}">
-                <a16:creationId xmlns:a16="http://schemas.microsoft.com/office/drawing/2014/main" id="{471D25AA-7BD9-ECB3-59E8-25336C4C17EC}"/>
+          <p:cNvPr id="11" name="Text Placeholder 2">
+            <a:extLst>
+              <a:ext uri="{FF2B5EF4-FFF2-40B4-BE49-F238E27FC236}">
+                <a16:creationId xmlns:a16="http://schemas.microsoft.com/office/drawing/2014/main" id="{D15FDAEC-9D07-638C-5BAE-D2258DEE0FE3}"/>
               </a:ext>
             </a:extLst>
           </p:cNvPr>
@@ -20057,20 +20381,24 @@
             <a:spLocks noGrp="1"/>
           </p:cNvSpPr>
           <p:nvPr>
-            <p:ph type="pic" idx="1"/>
+            <p:ph type="body" idx="1"/>
           </p:nvPr>
         </p:nvSpPr>
         <p:spPr>
           <a:xfrm>
-            <a:off x="1981200" y="1716405"/>
-            <a:ext cx="8229600" cy="3425190"/>
+            <a:off x="1482859" y="6011503"/>
+            <a:ext cx="3621024" cy="493776"/>
           </a:xfrm>
         </p:spPr>
         <p:txBody>
           <a:bodyPr/>
           <a:lstStyle/>
           <a:p>
-            <a:endParaRPr lang="en-US"/>
+            <a:pPr algn="ctr"/>
+            <a:r>
+              <a:rPr lang="en-US" sz="1050" dirty="0"/>
+              <a:t>Onboarding – Setting User’s Profile</a:t>
+            </a:r>
           </a:p>
         </p:txBody>
       </p:sp>
@@ -20090,16 +20418,312 @@
             <p:ph type="sldNum" sz="quarter" idx="12"/>
           </p:nvPr>
         </p:nvSpPr>
-        <p:spPr/>
-        <p:txBody>
-          <a:bodyPr/>
+        <p:spPr>
+          <a:xfrm>
+            <a:off x="329184" y="411480"/>
+            <a:ext cx="521208" cy="310896"/>
+          </a:xfrm>
+        </p:spPr>
+        <p:txBody>
+          <a:bodyPr anchor="ctr">
+            <a:normAutofit/>
+          </a:bodyPr>
           <a:lstStyle/>
           <a:p>
+            <a:pPr>
+              <a:spcAft>
+                <a:spcPts val="600"/>
+              </a:spcAft>
+            </a:pPr>
             <a:fld id="{294A09A9-5501-47C1-A89A-A340965A2BE2}" type="slidenum">
               <a:rPr lang="en-US" smtClean="0"/>
-              <a:t>7</a:t>
+              <a:pPr>
+                <a:spcAft>
+                  <a:spcPts val="600"/>
+                </a:spcAft>
+              </a:pPr>
+              <a:t>8</a:t>
             </a:fld>
-            <a:endParaRPr lang="en-US" dirty="0"/>
+            <a:endParaRPr lang="en-US"/>
+          </a:p>
+        </p:txBody>
+      </p:sp>
+      <p:pic>
+        <p:nvPicPr>
+          <p:cNvPr id="18" name="Content Placeholder 17">
+            <a:extLst>
+              <a:ext uri="{FF2B5EF4-FFF2-40B4-BE49-F238E27FC236}">
+                <a16:creationId xmlns:a16="http://schemas.microsoft.com/office/drawing/2014/main" id="{44F19042-8516-1968-8977-9D35B8F63AF6}"/>
+              </a:ext>
+            </a:extLst>
+          </p:cNvPr>
+          <p:cNvPicPr>
+            <a:picLocks noGrp="1" noChangeAspect="1"/>
+          </p:cNvPicPr>
+          <p:nvPr>
+            <p:ph sz="half" idx="2"/>
+          </p:nvPr>
+        </p:nvPicPr>
+        <p:blipFill>
+          <a:blip r:embed="rId2"/>
+          <a:stretch>
+            <a:fillRect/>
+          </a:stretch>
+        </p:blipFill>
+        <p:spPr>
+          <a:xfrm>
+            <a:off x="1545336" y="1895236"/>
+            <a:ext cx="3496070" cy="4116267"/>
+          </a:xfrm>
+          <a:prstGeom prst="rect">
+            <a:avLst/>
+          </a:prstGeom>
+        </p:spPr>
+      </p:pic>
+      <p:pic>
+        <p:nvPicPr>
+          <p:cNvPr id="21" name="Content Placeholder 20">
+            <a:extLst>
+              <a:ext uri="{FF2B5EF4-FFF2-40B4-BE49-F238E27FC236}">
+                <a16:creationId xmlns:a16="http://schemas.microsoft.com/office/drawing/2014/main" id="{AD2AE4E1-DFD1-1F26-7884-C8D45481B7B1}"/>
+              </a:ext>
+            </a:extLst>
+          </p:cNvPr>
+          <p:cNvPicPr>
+            <a:picLocks noGrp="1" noChangeAspect="1"/>
+          </p:cNvPicPr>
+          <p:nvPr>
+            <p:ph sz="quarter" idx="4"/>
+          </p:nvPr>
+        </p:nvPicPr>
+        <p:blipFill>
+          <a:blip r:embed="rId3"/>
+          <a:stretch>
+            <a:fillRect/>
+          </a:stretch>
+        </p:blipFill>
+        <p:spPr>
+          <a:xfrm>
+            <a:off x="5675376" y="1892129"/>
+            <a:ext cx="3621024" cy="4119374"/>
+          </a:xfrm>
+          <a:prstGeom prst="rect">
+            <a:avLst/>
+          </a:prstGeom>
+        </p:spPr>
+      </p:pic>
+      <p:sp>
+        <p:nvSpPr>
+          <p:cNvPr id="22" name="Text Placeholder 2">
+            <a:extLst>
+              <a:ext uri="{FF2B5EF4-FFF2-40B4-BE49-F238E27FC236}">
+                <a16:creationId xmlns:a16="http://schemas.microsoft.com/office/drawing/2014/main" id="{4970F54B-9397-07D9-0142-79CCAECE154C}"/>
+              </a:ext>
+            </a:extLst>
+          </p:cNvPr>
+          <p:cNvSpPr txBox="1">
+            <a:spLocks/>
+          </p:cNvSpPr>
+          <p:nvPr/>
+        </p:nvSpPr>
+        <p:spPr>
+          <a:xfrm>
+            <a:off x="5612899" y="6011503"/>
+            <a:ext cx="3621024" cy="493776"/>
+          </a:xfrm>
+          <a:prstGeom prst="rect">
+            <a:avLst/>
+          </a:prstGeom>
+        </p:spPr>
+        <p:txBody>
+          <a:bodyPr vert="horz" lIns="91440" tIns="45720" rIns="91440" bIns="45720" rtlCol="0" anchor="t">
+            <a:noAutofit/>
+          </a:bodyPr>
+          <a:lstStyle>
+            <a:lvl1pPr marL="0" indent="0" algn="l" defTabSz="914400" rtl="0" eaLnBrk="1" latinLnBrk="0" hangingPunct="1">
+              <a:lnSpc>
+                <a:spcPct val="90000"/>
+              </a:lnSpc>
+              <a:spcBef>
+                <a:spcPts val="1000"/>
+              </a:spcBef>
+              <a:buClr>
+                <a:schemeClr val="accent6"/>
+              </a:buClr>
+              <a:buFont typeface="Courier New" panose="02070309020205020404" pitchFamily="49" charset="0"/>
+              <a:buNone/>
+              <a:defRPr sz="2400" b="1" kern="1200">
+                <a:solidFill>
+                  <a:schemeClr val="bg1"/>
+                </a:solidFill>
+                <a:latin typeface="+mj-lt"/>
+                <a:ea typeface="+mn-ea"/>
+                <a:cs typeface="Segoe UI" panose="020B0502040204020203" pitchFamily="34" charset="0"/>
+              </a:defRPr>
+            </a:lvl1pPr>
+            <a:lvl2pPr marL="457200" indent="0" algn="l" defTabSz="914400" rtl="0" eaLnBrk="1" latinLnBrk="0" hangingPunct="1">
+              <a:lnSpc>
+                <a:spcPct val="90000"/>
+              </a:lnSpc>
+              <a:spcBef>
+                <a:spcPts val="500"/>
+              </a:spcBef>
+              <a:buClr>
+                <a:schemeClr val="accent6"/>
+              </a:buClr>
+              <a:buFont typeface="Courier New" panose="02070309020205020404" pitchFamily="49" charset="0"/>
+              <a:buNone/>
+              <a:defRPr sz="2000" b="1" kern="1200">
+                <a:solidFill>
+                  <a:schemeClr val="bg1"/>
+                </a:solidFill>
+                <a:latin typeface="+mn-lt"/>
+                <a:ea typeface="+mn-ea"/>
+                <a:cs typeface="Segoe UI" panose="020B0502040204020203" pitchFamily="34" charset="0"/>
+              </a:defRPr>
+            </a:lvl2pPr>
+            <a:lvl3pPr marL="914400" indent="0" algn="l" defTabSz="914400" rtl="0" eaLnBrk="1" latinLnBrk="0" hangingPunct="1">
+              <a:lnSpc>
+                <a:spcPct val="90000"/>
+              </a:lnSpc>
+              <a:spcBef>
+                <a:spcPts val="500"/>
+              </a:spcBef>
+              <a:buClr>
+                <a:schemeClr val="accent6"/>
+              </a:buClr>
+              <a:buFont typeface="Courier New" panose="02070309020205020404" pitchFamily="49" charset="0"/>
+              <a:buNone/>
+              <a:defRPr sz="1800" b="1" kern="1200">
+                <a:solidFill>
+                  <a:schemeClr val="bg1"/>
+                </a:solidFill>
+                <a:latin typeface="+mn-lt"/>
+                <a:ea typeface="+mn-ea"/>
+                <a:cs typeface="Segoe UI" panose="020B0502040204020203" pitchFamily="34" charset="0"/>
+              </a:defRPr>
+            </a:lvl3pPr>
+            <a:lvl4pPr marL="1371600" indent="0" algn="l" defTabSz="914400" rtl="0" eaLnBrk="1" latinLnBrk="0" hangingPunct="1">
+              <a:lnSpc>
+                <a:spcPct val="90000"/>
+              </a:lnSpc>
+              <a:spcBef>
+                <a:spcPts val="500"/>
+              </a:spcBef>
+              <a:buClr>
+                <a:schemeClr val="accent6"/>
+              </a:buClr>
+              <a:buFont typeface="Courier New" panose="02070309020205020404" pitchFamily="49" charset="0"/>
+              <a:buNone/>
+              <a:defRPr sz="1600" b="1" kern="1200">
+                <a:solidFill>
+                  <a:schemeClr val="bg1"/>
+                </a:solidFill>
+                <a:latin typeface="+mn-lt"/>
+                <a:ea typeface="+mn-ea"/>
+                <a:cs typeface="Segoe UI" panose="020B0502040204020203" pitchFamily="34" charset="0"/>
+              </a:defRPr>
+            </a:lvl4pPr>
+            <a:lvl5pPr marL="1828800" indent="0" algn="l" defTabSz="914400" rtl="0" eaLnBrk="1" latinLnBrk="0" hangingPunct="1">
+              <a:lnSpc>
+                <a:spcPct val="90000"/>
+              </a:lnSpc>
+              <a:spcBef>
+                <a:spcPts val="500"/>
+              </a:spcBef>
+              <a:buClr>
+                <a:schemeClr val="accent6"/>
+              </a:buClr>
+              <a:buFont typeface="Courier New" panose="02070309020205020404" pitchFamily="49" charset="0"/>
+              <a:buNone/>
+              <a:defRPr sz="1600" b="1" kern="1200">
+                <a:solidFill>
+                  <a:schemeClr val="bg1"/>
+                </a:solidFill>
+                <a:latin typeface="+mn-lt"/>
+                <a:ea typeface="+mn-ea"/>
+                <a:cs typeface="Segoe UI" panose="020B0502040204020203" pitchFamily="34" charset="0"/>
+              </a:defRPr>
+            </a:lvl5pPr>
+            <a:lvl6pPr marL="2286000" indent="0" algn="l" defTabSz="914400" rtl="0" eaLnBrk="1" latinLnBrk="0" hangingPunct="1">
+              <a:lnSpc>
+                <a:spcPct val="90000"/>
+              </a:lnSpc>
+              <a:spcBef>
+                <a:spcPts val="500"/>
+              </a:spcBef>
+              <a:buFont typeface="Arial" panose="020B0604020202020204" pitchFamily="34" charset="0"/>
+              <a:buNone/>
+              <a:defRPr sz="1600" b="1" kern="1200">
+                <a:solidFill>
+                  <a:schemeClr val="tx1"/>
+                </a:solidFill>
+                <a:latin typeface="+mn-lt"/>
+                <a:ea typeface="+mn-ea"/>
+                <a:cs typeface="+mn-cs"/>
+              </a:defRPr>
+            </a:lvl6pPr>
+            <a:lvl7pPr marL="2743200" indent="0" algn="l" defTabSz="914400" rtl="0" eaLnBrk="1" latinLnBrk="0" hangingPunct="1">
+              <a:lnSpc>
+                <a:spcPct val="90000"/>
+              </a:lnSpc>
+              <a:spcBef>
+                <a:spcPts val="500"/>
+              </a:spcBef>
+              <a:buFont typeface="Arial" panose="020B0604020202020204" pitchFamily="34" charset="0"/>
+              <a:buNone/>
+              <a:defRPr sz="1600" b="1" kern="1200">
+                <a:solidFill>
+                  <a:schemeClr val="tx1"/>
+                </a:solidFill>
+                <a:latin typeface="+mn-lt"/>
+                <a:ea typeface="+mn-ea"/>
+                <a:cs typeface="+mn-cs"/>
+              </a:defRPr>
+            </a:lvl7pPr>
+            <a:lvl8pPr marL="3200400" indent="0" algn="l" defTabSz="914400" rtl="0" eaLnBrk="1" latinLnBrk="0" hangingPunct="1">
+              <a:lnSpc>
+                <a:spcPct val="90000"/>
+              </a:lnSpc>
+              <a:spcBef>
+                <a:spcPts val="500"/>
+              </a:spcBef>
+              <a:buFont typeface="Arial" panose="020B0604020202020204" pitchFamily="34" charset="0"/>
+              <a:buNone/>
+              <a:defRPr sz="1600" b="1" kern="1200">
+                <a:solidFill>
+                  <a:schemeClr val="tx1"/>
+                </a:solidFill>
+                <a:latin typeface="+mn-lt"/>
+                <a:ea typeface="+mn-ea"/>
+                <a:cs typeface="+mn-cs"/>
+              </a:defRPr>
+            </a:lvl8pPr>
+            <a:lvl9pPr marL="3657600" indent="0" algn="l" defTabSz="914400" rtl="0" eaLnBrk="1" latinLnBrk="0" hangingPunct="1">
+              <a:lnSpc>
+                <a:spcPct val="90000"/>
+              </a:lnSpc>
+              <a:spcBef>
+                <a:spcPts val="500"/>
+              </a:spcBef>
+              <a:buFont typeface="Arial" panose="020B0604020202020204" pitchFamily="34" charset="0"/>
+              <a:buNone/>
+              <a:defRPr sz="1600" b="1" kern="1200">
+                <a:solidFill>
+                  <a:schemeClr val="tx1"/>
+                </a:solidFill>
+                <a:latin typeface="+mn-lt"/>
+                <a:ea typeface="+mn-ea"/>
+                <a:cs typeface="+mn-cs"/>
+              </a:defRPr>
+            </a:lvl9pPr>
+          </a:lstStyle>
+          <a:p>
+            <a:pPr algn="ctr"/>
+            <a:r>
+              <a:rPr lang="en-US" sz="1050" dirty="0"/>
+              <a:t>Onboarding – User Previews AI generated meal</a:t>
+            </a:r>
           </a:p>
         </p:txBody>
       </p:sp>
@@ -20107,695 +20731,6 @@
     <p:extLst>
       <p:ext uri="{BB962C8B-B14F-4D97-AF65-F5344CB8AC3E}">
         <p14:creationId xmlns:p14="http://schemas.microsoft.com/office/powerpoint/2010/main" val="927513746"/>
-      </p:ext>
-    </p:extLst>
-  </p:cSld>
-  <p:clrMapOvr>
-    <a:masterClrMapping/>
-  </p:clrMapOvr>
-</p:sld>
-</file>
-
-<file path=ppt/slides/slide8.xml><?xml version="1.0" encoding="utf-8"?>
-<p:sld xmlns:a="http://schemas.openxmlformats.org/drawingml/2006/main" xmlns:r="http://schemas.openxmlformats.org/officeDocument/2006/relationships" xmlns:p="http://schemas.openxmlformats.org/presentationml/2006/main">
-  <p:cSld>
-    <p:spTree>
-      <p:nvGrpSpPr>
-        <p:cNvPr id="1" name=""/>
-        <p:cNvGrpSpPr/>
-        <p:nvPr/>
-      </p:nvGrpSpPr>
-      <p:grpSpPr>
-        <a:xfrm>
-          <a:off x="0" y="0"/>
-          <a:ext cx="0" cy="0"/>
-          <a:chOff x="0" y="0"/>
-          <a:chExt cx="0" cy="0"/>
-        </a:xfrm>
-      </p:grpSpPr>
-      <p:sp>
-        <p:nvSpPr>
-          <p:cNvPr id="2" name="Title 1">
-            <a:extLst>
-              <a:ext uri="{FF2B5EF4-FFF2-40B4-BE49-F238E27FC236}">
-                <a16:creationId xmlns:a16="http://schemas.microsoft.com/office/drawing/2014/main" id="{48C5BC92-868A-26B2-CBC0-C9D94E65F1A4}"/>
-              </a:ext>
-            </a:extLst>
-          </p:cNvPr>
-          <p:cNvSpPr>
-            <a:spLocks noGrp="1"/>
-          </p:cNvSpPr>
-          <p:nvPr>
-            <p:ph type="ctrTitle"/>
-          </p:nvPr>
-        </p:nvSpPr>
-        <p:spPr/>
-        <p:txBody>
-          <a:bodyPr/>
-          <a:lstStyle/>
-          <a:p>
-            <a:r>
-              <a:rPr lang="en-US" sz="4000" b="1" spc="600" dirty="0">
-                <a:ln w="28575">
-                  <a:noFill/>
-                  <a:prstDash val="solid"/>
-                </a:ln>
-                <a:solidFill>
-                  <a:schemeClr val="bg1"/>
-                </a:solidFill>
-                <a:latin typeface="Tw Cen MT" panose="020B0602020104020603" pitchFamily="34" charset="77"/>
-                <a:ea typeface="Verdana" panose="020B0604030504040204" pitchFamily="34" charset="0"/>
-                <a:cs typeface="Verdana" panose="020B0604030504040204" pitchFamily="34" charset="0"/>
-              </a:rPr>
-              <a:t>Results &amp; conclusions</a:t>
-            </a:r>
-            <a:endParaRPr lang="en-US" dirty="0"/>
-          </a:p>
-        </p:txBody>
-      </p:sp>
-      <p:sp>
-        <p:nvSpPr>
-          <p:cNvPr id="3" name="Subtitle 2">
-            <a:extLst>
-              <a:ext uri="{FF2B5EF4-FFF2-40B4-BE49-F238E27FC236}">
-                <a16:creationId xmlns:a16="http://schemas.microsoft.com/office/drawing/2014/main" id="{6F9C1627-7A56-025E-482D-E2AB014EDF92}"/>
-              </a:ext>
-            </a:extLst>
-          </p:cNvPr>
-          <p:cNvSpPr>
-            <a:spLocks noGrp="1"/>
-          </p:cNvSpPr>
-          <p:nvPr>
-            <p:ph type="subTitle" idx="1"/>
-          </p:nvPr>
-        </p:nvSpPr>
-        <p:spPr/>
-        <p:txBody>
-          <a:bodyPr/>
-          <a:lstStyle/>
-          <a:p>
-            <a:r>
-              <a:rPr lang="en-US" sz="1800" dirty="0" err="1">
-                <a:solidFill>
-                  <a:schemeClr val="bg1"/>
-                </a:solidFill>
-                <a:latin typeface="Segoe UI Light" panose="020B0502040204020203" pitchFamily="34" charset="0"/>
-                <a:ea typeface="+mn-lt"/>
-                <a:cs typeface="Segoe UI Light" panose="020B0502040204020203" pitchFamily="34" charset="0"/>
-              </a:rPr>
-              <a:t>FitTrack</a:t>
-            </a:r>
-            <a:r>
-              <a:rPr lang="en-US" sz="1800" dirty="0">
-                <a:solidFill>
-                  <a:schemeClr val="bg1"/>
-                </a:solidFill>
-                <a:latin typeface="Segoe UI Light" panose="020B0502040204020203" pitchFamily="34" charset="0"/>
-                <a:ea typeface="+mn-lt"/>
-                <a:cs typeface="Segoe UI Light" panose="020B0502040204020203" pitchFamily="34" charset="0"/>
-              </a:rPr>
-              <a:t> </a:t>
-            </a:r>
-            <a:r>
-              <a:rPr lang="en-US" sz="1800" dirty="0" err="1">
-                <a:solidFill>
-                  <a:schemeClr val="bg1"/>
-                </a:solidFill>
-                <a:latin typeface="Segoe UI Light" panose="020B0502040204020203" pitchFamily="34" charset="0"/>
-                <a:ea typeface="+mn-lt"/>
-                <a:cs typeface="Segoe UI Light" panose="020B0502040204020203" pitchFamily="34" charset="0"/>
-              </a:rPr>
-              <a:t>este</a:t>
-            </a:r>
-            <a:r>
-              <a:rPr lang="en-US" sz="1800" dirty="0">
-                <a:solidFill>
-                  <a:schemeClr val="bg1"/>
-                </a:solidFill>
-                <a:latin typeface="Segoe UI Light" panose="020B0502040204020203" pitchFamily="34" charset="0"/>
-                <a:ea typeface="+mn-lt"/>
-                <a:cs typeface="Segoe UI Light" panose="020B0502040204020203" pitchFamily="34" charset="0"/>
-              </a:rPr>
-              <a:t> o </a:t>
-            </a:r>
-            <a:r>
-              <a:rPr lang="en-US" sz="1800" dirty="0" err="1">
-                <a:solidFill>
-                  <a:schemeClr val="bg1"/>
-                </a:solidFill>
-                <a:latin typeface="Segoe UI Light" panose="020B0502040204020203" pitchFamily="34" charset="0"/>
-                <a:ea typeface="+mn-lt"/>
-                <a:cs typeface="Segoe UI Light" panose="020B0502040204020203" pitchFamily="34" charset="0"/>
-              </a:rPr>
-              <a:t>aplicație</a:t>
-            </a:r>
-            <a:r>
-              <a:rPr lang="en-US" sz="1800" dirty="0">
-                <a:solidFill>
-                  <a:schemeClr val="bg1"/>
-                </a:solidFill>
-                <a:latin typeface="Segoe UI Light" panose="020B0502040204020203" pitchFamily="34" charset="0"/>
-                <a:ea typeface="+mn-lt"/>
-                <a:cs typeface="Segoe UI Light" panose="020B0502040204020203" pitchFamily="34" charset="0"/>
-              </a:rPr>
-              <a:t> </a:t>
-            </a:r>
-            <a:r>
-              <a:rPr lang="en-US" sz="1800" dirty="0" err="1">
-                <a:solidFill>
-                  <a:schemeClr val="bg1"/>
-                </a:solidFill>
-                <a:latin typeface="Segoe UI Light" panose="020B0502040204020203" pitchFamily="34" charset="0"/>
-                <a:ea typeface="+mn-lt"/>
-                <a:cs typeface="Segoe UI Light" panose="020B0502040204020203" pitchFamily="34" charset="0"/>
-              </a:rPr>
-              <a:t>puternică</a:t>
-            </a:r>
-            <a:r>
-              <a:rPr lang="en-US" sz="1800" dirty="0">
-                <a:solidFill>
-                  <a:schemeClr val="bg1"/>
-                </a:solidFill>
-                <a:latin typeface="Segoe UI Light" panose="020B0502040204020203" pitchFamily="34" charset="0"/>
-                <a:ea typeface="+mn-lt"/>
-                <a:cs typeface="Segoe UI Light" panose="020B0502040204020203" pitchFamily="34" charset="0"/>
-              </a:rPr>
-              <a:t> </a:t>
-            </a:r>
-            <a:r>
-              <a:rPr lang="en-US" sz="1800" dirty="0" err="1">
-                <a:solidFill>
-                  <a:schemeClr val="bg1"/>
-                </a:solidFill>
-                <a:latin typeface="Segoe UI Light" panose="020B0502040204020203" pitchFamily="34" charset="0"/>
-                <a:ea typeface="+mn-lt"/>
-                <a:cs typeface="Segoe UI Light" panose="020B0502040204020203" pitchFamily="34" charset="0"/>
-              </a:rPr>
-              <a:t>și</a:t>
-            </a:r>
-            <a:r>
-              <a:rPr lang="en-US" sz="1800" dirty="0">
-                <a:solidFill>
-                  <a:schemeClr val="bg1"/>
-                </a:solidFill>
-                <a:latin typeface="Segoe UI Light" panose="020B0502040204020203" pitchFamily="34" charset="0"/>
-                <a:ea typeface="+mn-lt"/>
-                <a:cs typeface="Segoe UI Light" panose="020B0502040204020203" pitchFamily="34" charset="0"/>
-              </a:rPr>
-              <a:t> </a:t>
-            </a:r>
-            <a:r>
-              <a:rPr lang="en-US" sz="1800" dirty="0" err="1">
-                <a:solidFill>
-                  <a:schemeClr val="bg1"/>
-                </a:solidFill>
-                <a:latin typeface="Segoe UI Light" panose="020B0502040204020203" pitchFamily="34" charset="0"/>
-                <a:ea typeface="+mn-lt"/>
-                <a:cs typeface="Segoe UI Light" panose="020B0502040204020203" pitchFamily="34" charset="0"/>
-              </a:rPr>
-              <a:t>versatilă</a:t>
-            </a:r>
-            <a:r>
-              <a:rPr lang="en-US" sz="1800" dirty="0">
-                <a:solidFill>
-                  <a:schemeClr val="bg1"/>
-                </a:solidFill>
-                <a:latin typeface="Segoe UI Light" panose="020B0502040204020203" pitchFamily="34" charset="0"/>
-                <a:ea typeface="+mn-lt"/>
-                <a:cs typeface="Segoe UI Light" panose="020B0502040204020203" pitchFamily="34" charset="0"/>
-              </a:rPr>
-              <a:t> </a:t>
-            </a:r>
-            <a:r>
-              <a:rPr lang="en-US" sz="1800" dirty="0" err="1">
-                <a:solidFill>
-                  <a:schemeClr val="bg1"/>
-                </a:solidFill>
-                <a:latin typeface="Segoe UI Light" panose="020B0502040204020203" pitchFamily="34" charset="0"/>
-                <a:ea typeface="+mn-lt"/>
-                <a:cs typeface="Segoe UI Light" panose="020B0502040204020203" pitchFamily="34" charset="0"/>
-              </a:rPr>
-              <a:t>pentru</a:t>
-            </a:r>
-            <a:r>
-              <a:rPr lang="en-US" sz="1800" dirty="0">
-                <a:solidFill>
-                  <a:schemeClr val="bg1"/>
-                </a:solidFill>
-                <a:latin typeface="Segoe UI Light" panose="020B0502040204020203" pitchFamily="34" charset="0"/>
-                <a:ea typeface="+mn-lt"/>
-                <a:cs typeface="Segoe UI Light" panose="020B0502040204020203" pitchFamily="34" charset="0"/>
-              </a:rPr>
-              <a:t> </a:t>
-            </a:r>
-            <a:r>
-              <a:rPr lang="en-US" sz="1800" dirty="0" err="1">
-                <a:solidFill>
-                  <a:schemeClr val="bg1"/>
-                </a:solidFill>
-                <a:latin typeface="Segoe UI Light" panose="020B0502040204020203" pitchFamily="34" charset="0"/>
-                <a:ea typeface="+mn-lt"/>
-                <a:cs typeface="Segoe UI Light" panose="020B0502040204020203" pitchFamily="34" charset="0"/>
-              </a:rPr>
-              <a:t>gestionarea</a:t>
-            </a:r>
-            <a:r>
-              <a:rPr lang="en-US" sz="1800" dirty="0">
-                <a:solidFill>
-                  <a:schemeClr val="bg1"/>
-                </a:solidFill>
-                <a:latin typeface="Segoe UI Light" panose="020B0502040204020203" pitchFamily="34" charset="0"/>
-                <a:ea typeface="+mn-lt"/>
-                <a:cs typeface="Segoe UI Light" panose="020B0502040204020203" pitchFamily="34" charset="0"/>
-              </a:rPr>
-              <a:t> </a:t>
-            </a:r>
-            <a:r>
-              <a:rPr lang="en-US" sz="1800" dirty="0" err="1">
-                <a:solidFill>
-                  <a:schemeClr val="bg1"/>
-                </a:solidFill>
-                <a:latin typeface="Segoe UI Light" panose="020B0502040204020203" pitchFamily="34" charset="0"/>
-                <a:ea typeface="+mn-lt"/>
-                <a:cs typeface="Segoe UI Light" panose="020B0502040204020203" pitchFamily="34" charset="0"/>
-              </a:rPr>
-              <a:t>antrenamentelor</a:t>
-            </a:r>
-            <a:r>
-              <a:rPr lang="en-US" sz="1800" dirty="0">
-                <a:solidFill>
-                  <a:schemeClr val="bg1"/>
-                </a:solidFill>
-                <a:latin typeface="Segoe UI Light" panose="020B0502040204020203" pitchFamily="34" charset="0"/>
-                <a:ea typeface="+mn-lt"/>
-                <a:cs typeface="Segoe UI Light" panose="020B0502040204020203" pitchFamily="34" charset="0"/>
-              </a:rPr>
-              <a:t> de fitness. </a:t>
-            </a:r>
-            <a:r>
-              <a:rPr lang="en-US" sz="1800" dirty="0" err="1">
-                <a:solidFill>
-                  <a:schemeClr val="bg1"/>
-                </a:solidFill>
-                <a:latin typeface="Segoe UI Light" panose="020B0502040204020203" pitchFamily="34" charset="0"/>
-                <a:ea typeface="+mn-lt"/>
-                <a:cs typeface="Segoe UI Light" panose="020B0502040204020203" pitchFamily="34" charset="0"/>
-              </a:rPr>
-              <a:t>Prin</a:t>
-            </a:r>
-            <a:r>
-              <a:rPr lang="en-US" sz="1800" dirty="0">
-                <a:solidFill>
-                  <a:schemeClr val="bg1"/>
-                </a:solidFill>
-                <a:latin typeface="Segoe UI Light" panose="020B0502040204020203" pitchFamily="34" charset="0"/>
-                <a:ea typeface="+mn-lt"/>
-                <a:cs typeface="Segoe UI Light" panose="020B0502040204020203" pitchFamily="34" charset="0"/>
-              </a:rPr>
-              <a:t> </a:t>
-            </a:r>
-            <a:r>
-              <a:rPr lang="en-US" sz="1800" dirty="0" err="1">
-                <a:solidFill>
-                  <a:schemeClr val="bg1"/>
-                </a:solidFill>
-                <a:latin typeface="Segoe UI Light" panose="020B0502040204020203" pitchFamily="34" charset="0"/>
-                <a:ea typeface="+mn-lt"/>
-                <a:cs typeface="Segoe UI Light" panose="020B0502040204020203" pitchFamily="34" charset="0"/>
-              </a:rPr>
-              <a:t>utilizarea</a:t>
-            </a:r>
-            <a:r>
-              <a:rPr lang="en-US" sz="1800" dirty="0">
-                <a:solidFill>
-                  <a:schemeClr val="bg1"/>
-                </a:solidFill>
-                <a:latin typeface="Segoe UI Light" panose="020B0502040204020203" pitchFamily="34" charset="0"/>
-                <a:ea typeface="+mn-lt"/>
-                <a:cs typeface="Segoe UI Light" panose="020B0502040204020203" pitchFamily="34" charset="0"/>
-              </a:rPr>
-              <a:t> </a:t>
-            </a:r>
-            <a:r>
-              <a:rPr lang="en-US" sz="1800" dirty="0" err="1">
-                <a:solidFill>
-                  <a:schemeClr val="bg1"/>
-                </a:solidFill>
-                <a:latin typeface="Segoe UI Light" panose="020B0502040204020203" pitchFamily="34" charset="0"/>
-                <a:ea typeface="+mn-lt"/>
-                <a:cs typeface="Segoe UI Light" panose="020B0502040204020203" pitchFamily="34" charset="0"/>
-              </a:rPr>
-              <a:t>unor</a:t>
-            </a:r>
-            <a:r>
-              <a:rPr lang="en-US" sz="1800" dirty="0">
-                <a:solidFill>
-                  <a:schemeClr val="bg1"/>
-                </a:solidFill>
-                <a:latin typeface="Segoe UI Light" panose="020B0502040204020203" pitchFamily="34" charset="0"/>
-                <a:ea typeface="+mn-lt"/>
-                <a:cs typeface="Segoe UI Light" panose="020B0502040204020203" pitchFamily="34" charset="0"/>
-              </a:rPr>
-              <a:t> </a:t>
-            </a:r>
-            <a:r>
-              <a:rPr lang="en-US" sz="1800" dirty="0" err="1">
-                <a:solidFill>
-                  <a:schemeClr val="bg1"/>
-                </a:solidFill>
-                <a:latin typeface="Segoe UI Light" panose="020B0502040204020203" pitchFamily="34" charset="0"/>
-                <a:ea typeface="+mn-lt"/>
-                <a:cs typeface="Segoe UI Light" panose="020B0502040204020203" pitchFamily="34" charset="0"/>
-              </a:rPr>
-              <a:t>tehnologii</a:t>
-            </a:r>
-            <a:r>
-              <a:rPr lang="en-US" sz="1800" dirty="0">
-                <a:solidFill>
-                  <a:schemeClr val="bg1"/>
-                </a:solidFill>
-                <a:latin typeface="Segoe UI Light" panose="020B0502040204020203" pitchFamily="34" charset="0"/>
-                <a:ea typeface="+mn-lt"/>
-                <a:cs typeface="Segoe UI Light" panose="020B0502040204020203" pitchFamily="34" charset="0"/>
-              </a:rPr>
-              <a:t> </a:t>
-            </a:r>
-            <a:r>
-              <a:rPr lang="en-US" sz="1800" dirty="0" err="1">
-                <a:solidFill>
-                  <a:schemeClr val="bg1"/>
-                </a:solidFill>
-                <a:latin typeface="Segoe UI Light" panose="020B0502040204020203" pitchFamily="34" charset="0"/>
-                <a:ea typeface="+mn-lt"/>
-                <a:cs typeface="Segoe UI Light" panose="020B0502040204020203" pitchFamily="34" charset="0"/>
-              </a:rPr>
-              <a:t>moderne</a:t>
-            </a:r>
-            <a:r>
-              <a:rPr lang="en-US" sz="1800" dirty="0">
-                <a:solidFill>
-                  <a:schemeClr val="bg1"/>
-                </a:solidFill>
-                <a:latin typeface="Segoe UI Light" panose="020B0502040204020203" pitchFamily="34" charset="0"/>
-                <a:ea typeface="+mn-lt"/>
-                <a:cs typeface="Segoe UI Light" panose="020B0502040204020203" pitchFamily="34" charset="0"/>
-              </a:rPr>
-              <a:t> </a:t>
-            </a:r>
-            <a:r>
-              <a:rPr lang="en-US" sz="1800" dirty="0" err="1">
-                <a:solidFill>
-                  <a:schemeClr val="bg1"/>
-                </a:solidFill>
-                <a:latin typeface="Segoe UI Light" panose="020B0502040204020203" pitchFamily="34" charset="0"/>
-                <a:ea typeface="+mn-lt"/>
-                <a:cs typeface="Segoe UI Light" panose="020B0502040204020203" pitchFamily="34" charset="0"/>
-              </a:rPr>
-              <a:t>și</a:t>
-            </a:r>
-            <a:r>
-              <a:rPr lang="en-US" sz="1800" dirty="0">
-                <a:solidFill>
-                  <a:schemeClr val="bg1"/>
-                </a:solidFill>
-                <a:latin typeface="Segoe UI Light" panose="020B0502040204020203" pitchFamily="34" charset="0"/>
-                <a:ea typeface="+mn-lt"/>
-                <a:cs typeface="Segoe UI Light" panose="020B0502040204020203" pitchFamily="34" charset="0"/>
-              </a:rPr>
-              <a:t> a </a:t>
-            </a:r>
-            <a:r>
-              <a:rPr lang="en-US" sz="1800" dirty="0" err="1">
-                <a:solidFill>
-                  <a:schemeClr val="bg1"/>
-                </a:solidFill>
-                <a:latin typeface="Segoe UI Light" panose="020B0502040204020203" pitchFamily="34" charset="0"/>
-                <a:ea typeface="+mn-lt"/>
-                <a:cs typeface="Segoe UI Light" panose="020B0502040204020203" pitchFamily="34" charset="0"/>
-              </a:rPr>
-              <a:t>unei</a:t>
-            </a:r>
-            <a:r>
-              <a:rPr lang="en-US" sz="1800" dirty="0">
-                <a:solidFill>
-                  <a:schemeClr val="bg1"/>
-                </a:solidFill>
-                <a:latin typeface="Segoe UI Light" panose="020B0502040204020203" pitchFamily="34" charset="0"/>
-                <a:ea typeface="+mn-lt"/>
-                <a:cs typeface="Segoe UI Light" panose="020B0502040204020203" pitchFamily="34" charset="0"/>
-              </a:rPr>
-              <a:t> </a:t>
-            </a:r>
-            <a:r>
-              <a:rPr lang="en-US" sz="1800" dirty="0" err="1">
-                <a:solidFill>
-                  <a:schemeClr val="bg1"/>
-                </a:solidFill>
-                <a:latin typeface="Segoe UI Light" panose="020B0502040204020203" pitchFamily="34" charset="0"/>
-                <a:ea typeface="+mn-lt"/>
-                <a:cs typeface="Segoe UI Light" panose="020B0502040204020203" pitchFamily="34" charset="0"/>
-              </a:rPr>
-              <a:t>planificări</a:t>
-            </a:r>
-            <a:r>
-              <a:rPr lang="en-US" sz="1800" dirty="0">
-                <a:solidFill>
-                  <a:schemeClr val="bg1"/>
-                </a:solidFill>
-                <a:latin typeface="Segoe UI Light" panose="020B0502040204020203" pitchFamily="34" charset="0"/>
-                <a:ea typeface="+mn-lt"/>
-                <a:cs typeface="Segoe UI Light" panose="020B0502040204020203" pitchFamily="34" charset="0"/>
-              </a:rPr>
-              <a:t> </a:t>
-            </a:r>
-            <a:r>
-              <a:rPr lang="en-US" sz="1800" dirty="0" err="1">
-                <a:solidFill>
-                  <a:schemeClr val="bg1"/>
-                </a:solidFill>
-                <a:latin typeface="Segoe UI Light" panose="020B0502040204020203" pitchFamily="34" charset="0"/>
-                <a:ea typeface="+mn-lt"/>
-                <a:cs typeface="Segoe UI Light" panose="020B0502040204020203" pitchFamily="34" charset="0"/>
-              </a:rPr>
-              <a:t>riguroase</a:t>
-            </a:r>
-            <a:r>
-              <a:rPr lang="en-US" sz="1800" dirty="0">
-                <a:solidFill>
-                  <a:schemeClr val="bg1"/>
-                </a:solidFill>
-                <a:latin typeface="Segoe UI Light" panose="020B0502040204020203" pitchFamily="34" charset="0"/>
-                <a:ea typeface="+mn-lt"/>
-                <a:cs typeface="Segoe UI Light" panose="020B0502040204020203" pitchFamily="34" charset="0"/>
-              </a:rPr>
-              <a:t>, </a:t>
-            </a:r>
-            <a:r>
-              <a:rPr lang="en-US" sz="1800" dirty="0" err="1">
-                <a:solidFill>
-                  <a:schemeClr val="bg1"/>
-                </a:solidFill>
-                <a:latin typeface="Segoe UI Light" panose="020B0502040204020203" pitchFamily="34" charset="0"/>
-                <a:ea typeface="+mn-lt"/>
-                <a:cs typeface="Segoe UI Light" panose="020B0502040204020203" pitchFamily="34" charset="0"/>
-              </a:rPr>
-              <a:t>aplicația</a:t>
-            </a:r>
-            <a:r>
-              <a:rPr lang="en-US" sz="1800" dirty="0">
-                <a:solidFill>
-                  <a:schemeClr val="bg1"/>
-                </a:solidFill>
-                <a:latin typeface="Segoe UI Light" panose="020B0502040204020203" pitchFamily="34" charset="0"/>
-                <a:ea typeface="+mn-lt"/>
-                <a:cs typeface="Segoe UI Light" panose="020B0502040204020203" pitchFamily="34" charset="0"/>
-              </a:rPr>
-              <a:t> </a:t>
-            </a:r>
-            <a:r>
-              <a:rPr lang="en-US" sz="1800" dirty="0" err="1">
-                <a:solidFill>
-                  <a:schemeClr val="bg1"/>
-                </a:solidFill>
-                <a:latin typeface="Segoe UI Light" panose="020B0502040204020203" pitchFamily="34" charset="0"/>
-                <a:ea typeface="+mn-lt"/>
-                <a:cs typeface="Segoe UI Light" panose="020B0502040204020203" pitchFamily="34" charset="0"/>
-              </a:rPr>
-              <a:t>oferă</a:t>
-            </a:r>
-            <a:r>
-              <a:rPr lang="en-US" sz="1800" dirty="0">
-                <a:solidFill>
-                  <a:schemeClr val="bg1"/>
-                </a:solidFill>
-                <a:latin typeface="Segoe UI Light" panose="020B0502040204020203" pitchFamily="34" charset="0"/>
-                <a:ea typeface="+mn-lt"/>
-                <a:cs typeface="Segoe UI Light" panose="020B0502040204020203" pitchFamily="34" charset="0"/>
-              </a:rPr>
-              <a:t> o </a:t>
-            </a:r>
-            <a:r>
-              <a:rPr lang="en-US" sz="1800" dirty="0" err="1">
-                <a:solidFill>
-                  <a:schemeClr val="bg1"/>
-                </a:solidFill>
-                <a:latin typeface="Segoe UI Light" panose="020B0502040204020203" pitchFamily="34" charset="0"/>
-                <a:ea typeface="+mn-lt"/>
-                <a:cs typeface="Segoe UI Light" panose="020B0502040204020203" pitchFamily="34" charset="0"/>
-              </a:rPr>
-              <a:t>soluție</a:t>
-            </a:r>
-            <a:r>
-              <a:rPr lang="en-US" sz="1800" dirty="0">
-                <a:solidFill>
-                  <a:schemeClr val="bg1"/>
-                </a:solidFill>
-                <a:latin typeface="Segoe UI Light" panose="020B0502040204020203" pitchFamily="34" charset="0"/>
-                <a:ea typeface="+mn-lt"/>
-                <a:cs typeface="Segoe UI Light" panose="020B0502040204020203" pitchFamily="34" charset="0"/>
-              </a:rPr>
-              <a:t> </a:t>
-            </a:r>
-            <a:r>
-              <a:rPr lang="en-US" sz="1800" dirty="0" err="1">
-                <a:solidFill>
-                  <a:schemeClr val="bg1"/>
-                </a:solidFill>
-                <a:latin typeface="Segoe UI Light" panose="020B0502040204020203" pitchFamily="34" charset="0"/>
-                <a:ea typeface="+mn-lt"/>
-                <a:cs typeface="Segoe UI Light" panose="020B0502040204020203" pitchFamily="34" charset="0"/>
-              </a:rPr>
-              <a:t>completă</a:t>
-            </a:r>
-            <a:r>
-              <a:rPr lang="en-US" sz="1800" dirty="0">
-                <a:solidFill>
-                  <a:schemeClr val="bg1"/>
-                </a:solidFill>
-                <a:latin typeface="Segoe UI Light" panose="020B0502040204020203" pitchFamily="34" charset="0"/>
-                <a:ea typeface="+mn-lt"/>
-                <a:cs typeface="Segoe UI Light" panose="020B0502040204020203" pitchFamily="34" charset="0"/>
-              </a:rPr>
-              <a:t> </a:t>
-            </a:r>
-            <a:r>
-              <a:rPr lang="en-US" sz="1800" dirty="0" err="1">
-                <a:solidFill>
-                  <a:schemeClr val="bg1"/>
-                </a:solidFill>
-                <a:latin typeface="Segoe UI Light" panose="020B0502040204020203" pitchFamily="34" charset="0"/>
-                <a:ea typeface="+mn-lt"/>
-                <a:cs typeface="Segoe UI Light" panose="020B0502040204020203" pitchFamily="34" charset="0"/>
-              </a:rPr>
-              <a:t>pentru</a:t>
-            </a:r>
-            <a:r>
-              <a:rPr lang="en-US" sz="1800" dirty="0">
-                <a:solidFill>
-                  <a:schemeClr val="bg1"/>
-                </a:solidFill>
-                <a:latin typeface="Segoe UI Light" panose="020B0502040204020203" pitchFamily="34" charset="0"/>
-                <a:ea typeface="+mn-lt"/>
-                <a:cs typeface="Segoe UI Light" panose="020B0502040204020203" pitchFamily="34" charset="0"/>
-              </a:rPr>
-              <a:t> </a:t>
-            </a:r>
-            <a:r>
-              <a:rPr lang="en-US" sz="1800" dirty="0" err="1">
-                <a:solidFill>
-                  <a:schemeClr val="bg1"/>
-                </a:solidFill>
-                <a:latin typeface="Segoe UI Light" panose="020B0502040204020203" pitchFamily="34" charset="0"/>
-                <a:ea typeface="+mn-lt"/>
-                <a:cs typeface="Segoe UI Light" panose="020B0502040204020203" pitchFamily="34" charset="0"/>
-              </a:rPr>
-              <a:t>monitorizarea</a:t>
-            </a:r>
-            <a:r>
-              <a:rPr lang="en-US" sz="1800" dirty="0">
-                <a:solidFill>
-                  <a:schemeClr val="bg1"/>
-                </a:solidFill>
-                <a:latin typeface="Segoe UI Light" panose="020B0502040204020203" pitchFamily="34" charset="0"/>
-                <a:ea typeface="+mn-lt"/>
-                <a:cs typeface="Segoe UI Light" panose="020B0502040204020203" pitchFamily="34" charset="0"/>
-              </a:rPr>
-              <a:t> </a:t>
-            </a:r>
-            <a:r>
-              <a:rPr lang="en-US" sz="1800" dirty="0" err="1">
-                <a:solidFill>
-                  <a:schemeClr val="bg1"/>
-                </a:solidFill>
-                <a:latin typeface="Segoe UI Light" panose="020B0502040204020203" pitchFamily="34" charset="0"/>
-                <a:ea typeface="+mn-lt"/>
-                <a:cs typeface="Segoe UI Light" panose="020B0502040204020203" pitchFamily="34" charset="0"/>
-              </a:rPr>
-              <a:t>și</a:t>
-            </a:r>
-            <a:r>
-              <a:rPr lang="en-US" sz="1800" dirty="0">
-                <a:solidFill>
-                  <a:schemeClr val="bg1"/>
-                </a:solidFill>
-                <a:latin typeface="Segoe UI Light" panose="020B0502040204020203" pitchFamily="34" charset="0"/>
-                <a:ea typeface="+mn-lt"/>
-                <a:cs typeface="Segoe UI Light" panose="020B0502040204020203" pitchFamily="34" charset="0"/>
-              </a:rPr>
-              <a:t> </a:t>
-            </a:r>
-            <a:r>
-              <a:rPr lang="en-US" sz="1800" dirty="0" err="1">
-                <a:solidFill>
-                  <a:schemeClr val="bg1"/>
-                </a:solidFill>
-                <a:latin typeface="Segoe UI Light" panose="020B0502040204020203" pitchFamily="34" charset="0"/>
-                <a:ea typeface="+mn-lt"/>
-                <a:cs typeface="Segoe UI Light" panose="020B0502040204020203" pitchFamily="34" charset="0"/>
-              </a:rPr>
-              <a:t>îmbunătățirea</a:t>
-            </a:r>
-            <a:r>
-              <a:rPr lang="en-US" sz="1800" dirty="0">
-                <a:solidFill>
-                  <a:schemeClr val="bg1"/>
-                </a:solidFill>
-                <a:latin typeface="Segoe UI Light" panose="020B0502040204020203" pitchFamily="34" charset="0"/>
-                <a:ea typeface="+mn-lt"/>
-                <a:cs typeface="Segoe UI Light" panose="020B0502040204020203" pitchFamily="34" charset="0"/>
-              </a:rPr>
-              <a:t> </a:t>
-            </a:r>
-            <a:r>
-              <a:rPr lang="en-US" sz="1800" dirty="0" err="1">
-                <a:solidFill>
-                  <a:schemeClr val="bg1"/>
-                </a:solidFill>
-                <a:latin typeface="Segoe UI Light" panose="020B0502040204020203" pitchFamily="34" charset="0"/>
-                <a:ea typeface="+mn-lt"/>
-                <a:cs typeface="Segoe UI Light" panose="020B0502040204020203" pitchFamily="34" charset="0"/>
-              </a:rPr>
-              <a:t>performanțelor</a:t>
-            </a:r>
-            <a:r>
-              <a:rPr lang="en-US" sz="1800" dirty="0">
-                <a:solidFill>
-                  <a:schemeClr val="bg1"/>
-                </a:solidFill>
-                <a:latin typeface="Segoe UI Light" panose="020B0502040204020203" pitchFamily="34" charset="0"/>
-                <a:ea typeface="+mn-lt"/>
-                <a:cs typeface="Segoe UI Light" panose="020B0502040204020203" pitchFamily="34" charset="0"/>
-              </a:rPr>
-              <a:t>.</a:t>
-            </a:r>
-            <a:endParaRPr lang="en-US" dirty="0"/>
-          </a:p>
-        </p:txBody>
-      </p:sp>
-    </p:spTree>
-    <p:extLst>
-      <p:ext uri="{BB962C8B-B14F-4D97-AF65-F5344CB8AC3E}">
-        <p14:creationId xmlns:p14="http://schemas.microsoft.com/office/powerpoint/2010/main" val="1958759625"/>
       </p:ext>
     </p:extLst>
   </p:cSld>
@@ -20810,7 +20745,13 @@
   <p:cSld>
     <p:spTree>
       <p:nvGrpSpPr>
-        <p:cNvPr id="1" name=""/>
+        <p:cNvPr id="1" name="">
+          <a:extLst>
+            <a:ext uri="{FF2B5EF4-FFF2-40B4-BE49-F238E27FC236}">
+              <a16:creationId xmlns:a16="http://schemas.microsoft.com/office/drawing/2014/main" id="{67D408B6-4EC5-C9A1-8F6C-B4B52ED9647C}"/>
+            </a:ext>
+          </a:extLst>
+        </p:cNvPr>
         <p:cNvGrpSpPr/>
         <p:nvPr/>
       </p:nvGrpSpPr>
@@ -20827,7 +20768,7 @@
           <p:cNvPr id="2" name="Title 1">
             <a:extLst>
               <a:ext uri="{FF2B5EF4-FFF2-40B4-BE49-F238E27FC236}">
-                <a16:creationId xmlns:a16="http://schemas.microsoft.com/office/drawing/2014/main" id="{2C9E1892-81E6-551C-7B5A-DEA68224520B}"/>
+                <a16:creationId xmlns:a16="http://schemas.microsoft.com/office/drawing/2014/main" id="{16E0747D-E5B0-5143-67EF-5E4CE8FB5E40}"/>
               </a:ext>
             </a:extLst>
           </p:cNvPr>
@@ -20840,37 +20781,29 @@
         </p:nvSpPr>
         <p:spPr>
           <a:xfrm>
-            <a:off x="6665976" y="2157984"/>
-            <a:ext cx="4718304" cy="1069848"/>
-          </a:xfrm>
-        </p:spPr>
-        <p:txBody>
-          <a:bodyPr/>
+            <a:off x="1545336" y="603439"/>
+            <a:ext cx="8878824" cy="1069848"/>
+          </a:xfrm>
+        </p:spPr>
+        <p:txBody>
+          <a:bodyPr anchor="b">
+            <a:normAutofit/>
+          </a:bodyPr>
           <a:lstStyle/>
           <a:p>
             <a:r>
-              <a:rPr lang="en-US" sz="4800" b="1" spc="600" dirty="0" err="1">
-                <a:ln w="28575">
-                  <a:noFill/>
-                  <a:prstDash val="solid"/>
-                </a:ln>
-                <a:solidFill>
-                  <a:schemeClr val="bg1"/>
-                </a:solidFill>
-                <a:latin typeface="Tw Cen MT" panose="020B0602020104020603" pitchFamily="34" charset="77"/>
-              </a:rPr>
-              <a:t>Q&amp;a</a:t>
+              <a:rPr lang="en-US" dirty="0"/>
+              <a:t>Application screenshots</a:t>
             </a:r>
-            <a:endParaRPr lang="en-US" dirty="0"/>
-          </a:p>
-        </p:txBody>
-      </p:sp>
-      <p:sp>
-        <p:nvSpPr>
-          <p:cNvPr id="3" name="Text Placeholder 2">
-            <a:extLst>
-              <a:ext uri="{FF2B5EF4-FFF2-40B4-BE49-F238E27FC236}">
-                <a16:creationId xmlns:a16="http://schemas.microsoft.com/office/drawing/2014/main" id="{55519D01-29BE-BE76-41C5-9D58AD8119DC}"/>
+          </a:p>
+        </p:txBody>
+      </p:sp>
+      <p:sp>
+        <p:nvSpPr>
+          <p:cNvPr id="11" name="Text Placeholder 2">
+            <a:extLst>
+              <a:ext uri="{FF2B5EF4-FFF2-40B4-BE49-F238E27FC236}">
+                <a16:creationId xmlns:a16="http://schemas.microsoft.com/office/drawing/2014/main" id="{48258611-417B-E299-2EB9-FEC67CE21EFD}"/>
               </a:ext>
             </a:extLst>
           </p:cNvPr>
@@ -20883,30 +20816,351 @@
         </p:nvSpPr>
         <p:spPr>
           <a:xfrm>
-            <a:off x="5779363" y="3374136"/>
-            <a:ext cx="5531765" cy="656326"/>
+            <a:off x="1773669" y="5888736"/>
+            <a:ext cx="3621024" cy="493776"/>
           </a:xfrm>
         </p:spPr>
         <p:txBody>
           <a:bodyPr/>
           <a:lstStyle/>
           <a:p>
-            <a:pPr algn="l"/>
+            <a:pPr algn="ctr"/>
             <a:r>
-              <a:rPr lang="en-US" b="1" dirty="0">
-                <a:latin typeface="Segoe UI Light" panose="020B0502040204020203" pitchFamily="34" charset="0"/>
-                <a:cs typeface="Segoe UI Light" panose="020B0502040204020203" pitchFamily="34" charset="0"/>
-              </a:rPr>
-              <a:t>Thanks for your attention!</a:t>
+              <a:rPr lang="en-US" sz="1050" dirty="0"/>
+              <a:t>Dashboard – Display user’s generated meal</a:t>
             </a:r>
-            <a:endParaRPr lang="en-US" dirty="0"/>
-          </a:p>
-        </p:txBody>
-      </p:sp>
+          </a:p>
+        </p:txBody>
+      </p:sp>
+      <p:sp>
+        <p:nvSpPr>
+          <p:cNvPr id="6" name="Slide Number Placeholder 5">
+            <a:extLst>
+              <a:ext uri="{FF2B5EF4-FFF2-40B4-BE49-F238E27FC236}">
+                <a16:creationId xmlns:a16="http://schemas.microsoft.com/office/drawing/2014/main" id="{7093DB3E-427D-734A-9665-7CFF67F8AD59}"/>
+              </a:ext>
+            </a:extLst>
+          </p:cNvPr>
+          <p:cNvSpPr>
+            <a:spLocks noGrp="1"/>
+          </p:cNvSpPr>
+          <p:nvPr>
+            <p:ph type="sldNum" sz="quarter" idx="12"/>
+          </p:nvPr>
+        </p:nvSpPr>
+        <p:spPr>
+          <a:xfrm>
+            <a:off x="329184" y="411480"/>
+            <a:ext cx="521208" cy="310896"/>
+          </a:xfrm>
+        </p:spPr>
+        <p:txBody>
+          <a:bodyPr anchor="ctr">
+            <a:normAutofit/>
+          </a:bodyPr>
+          <a:lstStyle/>
+          <a:p>
+            <a:pPr>
+              <a:spcAft>
+                <a:spcPts val="600"/>
+              </a:spcAft>
+            </a:pPr>
+            <a:fld id="{294A09A9-5501-47C1-A89A-A340965A2BE2}" type="slidenum">
+              <a:rPr lang="en-US" smtClean="0"/>
+              <a:pPr>
+                <a:spcAft>
+                  <a:spcPts val="600"/>
+                </a:spcAft>
+              </a:pPr>
+              <a:t>9</a:t>
+            </a:fld>
+            <a:endParaRPr lang="en-US"/>
+          </a:p>
+        </p:txBody>
+      </p:sp>
+      <p:sp>
+        <p:nvSpPr>
+          <p:cNvPr id="22" name="Text Placeholder 2">
+            <a:extLst>
+              <a:ext uri="{FF2B5EF4-FFF2-40B4-BE49-F238E27FC236}">
+                <a16:creationId xmlns:a16="http://schemas.microsoft.com/office/drawing/2014/main" id="{DDDBB415-6347-946A-D3DB-7B21B271321C}"/>
+              </a:ext>
+            </a:extLst>
+          </p:cNvPr>
+          <p:cNvSpPr txBox="1">
+            <a:spLocks/>
+          </p:cNvSpPr>
+          <p:nvPr/>
+        </p:nvSpPr>
+        <p:spPr>
+          <a:xfrm>
+            <a:off x="6096000" y="5888736"/>
+            <a:ext cx="3621024" cy="493776"/>
+          </a:xfrm>
+          <a:prstGeom prst="rect">
+            <a:avLst/>
+          </a:prstGeom>
+        </p:spPr>
+        <p:txBody>
+          <a:bodyPr vert="horz" lIns="91440" tIns="45720" rIns="91440" bIns="45720" rtlCol="0" anchor="t">
+            <a:noAutofit/>
+          </a:bodyPr>
+          <a:lstStyle>
+            <a:lvl1pPr marL="0" indent="0" algn="l" defTabSz="914400" rtl="0" eaLnBrk="1" latinLnBrk="0" hangingPunct="1">
+              <a:lnSpc>
+                <a:spcPct val="90000"/>
+              </a:lnSpc>
+              <a:spcBef>
+                <a:spcPts val="1000"/>
+              </a:spcBef>
+              <a:buClr>
+                <a:schemeClr val="accent6"/>
+              </a:buClr>
+              <a:buFont typeface="Courier New" panose="02070309020205020404" pitchFamily="49" charset="0"/>
+              <a:buNone/>
+              <a:defRPr sz="2400" b="1" kern="1200">
+                <a:solidFill>
+                  <a:schemeClr val="bg1"/>
+                </a:solidFill>
+                <a:latin typeface="+mj-lt"/>
+                <a:ea typeface="+mn-ea"/>
+                <a:cs typeface="Segoe UI" panose="020B0502040204020203" pitchFamily="34" charset="0"/>
+              </a:defRPr>
+            </a:lvl1pPr>
+            <a:lvl2pPr marL="457200" indent="0" algn="l" defTabSz="914400" rtl="0" eaLnBrk="1" latinLnBrk="0" hangingPunct="1">
+              <a:lnSpc>
+                <a:spcPct val="90000"/>
+              </a:lnSpc>
+              <a:spcBef>
+                <a:spcPts val="500"/>
+              </a:spcBef>
+              <a:buClr>
+                <a:schemeClr val="accent6"/>
+              </a:buClr>
+              <a:buFont typeface="Courier New" panose="02070309020205020404" pitchFamily="49" charset="0"/>
+              <a:buNone/>
+              <a:defRPr sz="2000" b="1" kern="1200">
+                <a:solidFill>
+                  <a:schemeClr val="bg1"/>
+                </a:solidFill>
+                <a:latin typeface="+mn-lt"/>
+                <a:ea typeface="+mn-ea"/>
+                <a:cs typeface="Segoe UI" panose="020B0502040204020203" pitchFamily="34" charset="0"/>
+              </a:defRPr>
+            </a:lvl2pPr>
+            <a:lvl3pPr marL="914400" indent="0" algn="l" defTabSz="914400" rtl="0" eaLnBrk="1" latinLnBrk="0" hangingPunct="1">
+              <a:lnSpc>
+                <a:spcPct val="90000"/>
+              </a:lnSpc>
+              <a:spcBef>
+                <a:spcPts val="500"/>
+              </a:spcBef>
+              <a:buClr>
+                <a:schemeClr val="accent6"/>
+              </a:buClr>
+              <a:buFont typeface="Courier New" panose="02070309020205020404" pitchFamily="49" charset="0"/>
+              <a:buNone/>
+              <a:defRPr sz="1800" b="1" kern="1200">
+                <a:solidFill>
+                  <a:schemeClr val="bg1"/>
+                </a:solidFill>
+                <a:latin typeface="+mn-lt"/>
+                <a:ea typeface="+mn-ea"/>
+                <a:cs typeface="Segoe UI" panose="020B0502040204020203" pitchFamily="34" charset="0"/>
+              </a:defRPr>
+            </a:lvl3pPr>
+            <a:lvl4pPr marL="1371600" indent="0" algn="l" defTabSz="914400" rtl="0" eaLnBrk="1" latinLnBrk="0" hangingPunct="1">
+              <a:lnSpc>
+                <a:spcPct val="90000"/>
+              </a:lnSpc>
+              <a:spcBef>
+                <a:spcPts val="500"/>
+              </a:spcBef>
+              <a:buClr>
+                <a:schemeClr val="accent6"/>
+              </a:buClr>
+              <a:buFont typeface="Courier New" panose="02070309020205020404" pitchFamily="49" charset="0"/>
+              <a:buNone/>
+              <a:defRPr sz="1600" b="1" kern="1200">
+                <a:solidFill>
+                  <a:schemeClr val="bg1"/>
+                </a:solidFill>
+                <a:latin typeface="+mn-lt"/>
+                <a:ea typeface="+mn-ea"/>
+                <a:cs typeface="Segoe UI" panose="020B0502040204020203" pitchFamily="34" charset="0"/>
+              </a:defRPr>
+            </a:lvl4pPr>
+            <a:lvl5pPr marL="1828800" indent="0" algn="l" defTabSz="914400" rtl="0" eaLnBrk="1" latinLnBrk="0" hangingPunct="1">
+              <a:lnSpc>
+                <a:spcPct val="90000"/>
+              </a:lnSpc>
+              <a:spcBef>
+                <a:spcPts val="500"/>
+              </a:spcBef>
+              <a:buClr>
+                <a:schemeClr val="accent6"/>
+              </a:buClr>
+              <a:buFont typeface="Courier New" panose="02070309020205020404" pitchFamily="49" charset="0"/>
+              <a:buNone/>
+              <a:defRPr sz="1600" b="1" kern="1200">
+                <a:solidFill>
+                  <a:schemeClr val="bg1"/>
+                </a:solidFill>
+                <a:latin typeface="+mn-lt"/>
+                <a:ea typeface="+mn-ea"/>
+                <a:cs typeface="Segoe UI" panose="020B0502040204020203" pitchFamily="34" charset="0"/>
+              </a:defRPr>
+            </a:lvl5pPr>
+            <a:lvl6pPr marL="2286000" indent="0" algn="l" defTabSz="914400" rtl="0" eaLnBrk="1" latinLnBrk="0" hangingPunct="1">
+              <a:lnSpc>
+                <a:spcPct val="90000"/>
+              </a:lnSpc>
+              <a:spcBef>
+                <a:spcPts val="500"/>
+              </a:spcBef>
+              <a:buFont typeface="Arial" panose="020B0604020202020204" pitchFamily="34" charset="0"/>
+              <a:buNone/>
+              <a:defRPr sz="1600" b="1" kern="1200">
+                <a:solidFill>
+                  <a:schemeClr val="tx1"/>
+                </a:solidFill>
+                <a:latin typeface="+mn-lt"/>
+                <a:ea typeface="+mn-ea"/>
+                <a:cs typeface="+mn-cs"/>
+              </a:defRPr>
+            </a:lvl6pPr>
+            <a:lvl7pPr marL="2743200" indent="0" algn="l" defTabSz="914400" rtl="0" eaLnBrk="1" latinLnBrk="0" hangingPunct="1">
+              <a:lnSpc>
+                <a:spcPct val="90000"/>
+              </a:lnSpc>
+              <a:spcBef>
+                <a:spcPts val="500"/>
+              </a:spcBef>
+              <a:buFont typeface="Arial" panose="020B0604020202020204" pitchFamily="34" charset="0"/>
+              <a:buNone/>
+              <a:defRPr sz="1600" b="1" kern="1200">
+                <a:solidFill>
+                  <a:schemeClr val="tx1"/>
+                </a:solidFill>
+                <a:latin typeface="+mn-lt"/>
+                <a:ea typeface="+mn-ea"/>
+                <a:cs typeface="+mn-cs"/>
+              </a:defRPr>
+            </a:lvl7pPr>
+            <a:lvl8pPr marL="3200400" indent="0" algn="l" defTabSz="914400" rtl="0" eaLnBrk="1" latinLnBrk="0" hangingPunct="1">
+              <a:lnSpc>
+                <a:spcPct val="90000"/>
+              </a:lnSpc>
+              <a:spcBef>
+                <a:spcPts val="500"/>
+              </a:spcBef>
+              <a:buFont typeface="Arial" panose="020B0604020202020204" pitchFamily="34" charset="0"/>
+              <a:buNone/>
+              <a:defRPr sz="1600" b="1" kern="1200">
+                <a:solidFill>
+                  <a:schemeClr val="tx1"/>
+                </a:solidFill>
+                <a:latin typeface="+mn-lt"/>
+                <a:ea typeface="+mn-ea"/>
+                <a:cs typeface="+mn-cs"/>
+              </a:defRPr>
+            </a:lvl8pPr>
+            <a:lvl9pPr marL="3657600" indent="0" algn="l" defTabSz="914400" rtl="0" eaLnBrk="1" latinLnBrk="0" hangingPunct="1">
+              <a:lnSpc>
+                <a:spcPct val="90000"/>
+              </a:lnSpc>
+              <a:spcBef>
+                <a:spcPts val="500"/>
+              </a:spcBef>
+              <a:buFont typeface="Arial" panose="020B0604020202020204" pitchFamily="34" charset="0"/>
+              <a:buNone/>
+              <a:defRPr sz="1600" b="1" kern="1200">
+                <a:solidFill>
+                  <a:schemeClr val="tx1"/>
+                </a:solidFill>
+                <a:latin typeface="+mn-lt"/>
+                <a:ea typeface="+mn-ea"/>
+                <a:cs typeface="+mn-cs"/>
+              </a:defRPr>
+            </a:lvl9pPr>
+          </a:lstStyle>
+          <a:p>
+            <a:pPr algn="ctr"/>
+            <a:r>
+              <a:rPr lang="en-US" sz="1050" dirty="0"/>
+              <a:t>Dashboard – User edits generated meal</a:t>
+            </a:r>
+          </a:p>
+        </p:txBody>
+      </p:sp>
+      <p:pic>
+        <p:nvPicPr>
+          <p:cNvPr id="9" name="Content Placeholder 8">
+            <a:extLst>
+              <a:ext uri="{FF2B5EF4-FFF2-40B4-BE49-F238E27FC236}">
+                <a16:creationId xmlns:a16="http://schemas.microsoft.com/office/drawing/2014/main" id="{EBEAFB7E-4568-0E47-8B70-983030FCECD6}"/>
+              </a:ext>
+            </a:extLst>
+          </p:cNvPr>
+          <p:cNvPicPr>
+            <a:picLocks noGrp="1" noChangeAspect="1"/>
+          </p:cNvPicPr>
+          <p:nvPr>
+            <p:ph sz="half" idx="2"/>
+          </p:nvPr>
+        </p:nvPicPr>
+        <p:blipFill>
+          <a:blip r:embed="rId2"/>
+          <a:stretch>
+            <a:fillRect/>
+          </a:stretch>
+        </p:blipFill>
+        <p:spPr>
+          <a:xfrm>
+            <a:off x="1183615" y="2125913"/>
+            <a:ext cx="4801133" cy="3593724"/>
+          </a:xfrm>
+          <a:prstGeom prst="rect">
+            <a:avLst/>
+          </a:prstGeom>
+        </p:spPr>
+      </p:pic>
+      <p:pic>
+        <p:nvPicPr>
+          <p:cNvPr id="16" name="Content Placeholder 15">
+            <a:extLst>
+              <a:ext uri="{FF2B5EF4-FFF2-40B4-BE49-F238E27FC236}">
+                <a16:creationId xmlns:a16="http://schemas.microsoft.com/office/drawing/2014/main" id="{2807BF0D-A686-AE29-09C5-47B3F1A1560E}"/>
+              </a:ext>
+            </a:extLst>
+          </p:cNvPr>
+          <p:cNvPicPr>
+            <a:picLocks noGrp="1" noChangeAspect="1"/>
+          </p:cNvPicPr>
+          <p:nvPr>
+            <p:ph sz="quarter" idx="4"/>
+          </p:nvPr>
+        </p:nvPicPr>
+        <p:blipFill>
+          <a:blip r:embed="rId3"/>
+          <a:stretch>
+            <a:fillRect/>
+          </a:stretch>
+        </p:blipFill>
+        <p:spPr>
+          <a:xfrm>
+            <a:off x="6096000" y="1961322"/>
+            <a:ext cx="3621024" cy="3758315"/>
+          </a:xfrm>
+          <a:prstGeom prst="rect">
+            <a:avLst/>
+          </a:prstGeom>
+        </p:spPr>
+      </p:pic>
     </p:spTree>
     <p:extLst>
       <p:ext uri="{BB962C8B-B14F-4D97-AF65-F5344CB8AC3E}">
-        <p14:creationId xmlns:p14="http://schemas.microsoft.com/office/powerpoint/2010/main" val="1877701230"/>
+        <p14:creationId xmlns:p14="http://schemas.microsoft.com/office/powerpoint/2010/main" val="87827971"/>
       </p:ext>
     </p:extLst>
   </p:cSld>
@@ -21413,15 +21667,6 @@
 </file>
 
 <file path=customXml/item1.xml><?xml version="1.0" encoding="utf-8"?>
-<?mso-contentType ?>
-<FormTemplates xmlns="http://schemas.microsoft.com/sharepoint/v3/contenttype/forms">
-  <Display>DocumentLibraryForm</Display>
-  <Edit>DocumentLibraryForm</Edit>
-  <New>DocumentLibraryForm</New>
-</FormTemplates>
-</file>
-
-<file path=customXml/item2.xml><?xml version="1.0" encoding="utf-8"?>
 <ct:contentTypeSchema xmlns:ct="http://schemas.microsoft.com/office/2006/metadata/contentType" xmlns:ma="http://schemas.microsoft.com/office/2006/metadata/properties/metaAttributes" ct:_="" ma:_="" ma:contentTypeName="Document" ma:contentTypeID="0x01010079F111ED35F8CC479449609E8A0923A6" ma:contentTypeVersion="25" ma:contentTypeDescription="Create a new document." ma:contentTypeScope="" ma:versionID="e02306daf00165b375dc6a58966960be">
   <xsd:schema xmlns:xsd="http://www.w3.org/2001/XMLSchema" xmlns:xs="http://www.w3.org/2001/XMLSchema" xmlns:p="http://schemas.microsoft.com/office/2006/metadata/properties" xmlns:ns1="http://schemas.microsoft.com/sharepoint/v3" xmlns:ns2="71af3243-3dd4-4a8d-8c0d-dd76da1f02a5" xmlns:ns3="16c05727-aa75-4e4a-9b5f-8a80a1165891" xmlns:ns4="230e9df3-be65-4c73-a93b-d1236ebd677e" targetNamespace="http://schemas.microsoft.com/office/2006/metadata/properties" ma:root="true" ma:fieldsID="df88fb76bf5f555224557953949c1ec9" ns1:_="" ns2:_="" ns3:_="" ns4:_="">
     <xsd:import namespace="http://schemas.microsoft.com/sharepoint/v3"/>
@@ -21715,6 +21960,15 @@
 </ct:contentTypeSchema>
 </file>
 
+<file path=customXml/item2.xml><?xml version="1.0" encoding="utf-8"?>
+<?mso-contentType ?>
+<FormTemplates xmlns="http://schemas.microsoft.com/sharepoint/v3/contenttype/forms">
+  <Display>DocumentLibraryForm</Display>
+  <Edit>DocumentLibraryForm</Edit>
+  <New>DocumentLibraryForm</New>
+</FormTemplates>
+</file>
+
 <file path=customXml/item3.xml><?xml version="1.0" encoding="utf-8"?>
 <p:properties xmlns:p="http://schemas.microsoft.com/office/2006/metadata/properties" xmlns:xsi="http://www.w3.org/2001/XMLSchema-instance" xmlns:pc="http://schemas.microsoft.com/office/infopath/2007/PartnerControls">
   <documentManagement>
@@ -21736,14 +21990,6 @@
 </file>
 
 <file path=customXml/itemProps1.xml><?xml version="1.0" encoding="utf-8"?>
-<ds:datastoreItem xmlns:ds="http://schemas.openxmlformats.org/officeDocument/2006/customXml" ds:itemID="{43C4A95C-9007-4EA6-944B-306B6F2A0100}">
-  <ds:schemaRefs>
-    <ds:schemaRef ds:uri="http://schemas.microsoft.com/sharepoint/v3/contenttype/forms"/>
-  </ds:schemaRefs>
-</ds:datastoreItem>
-</file>
-
-<file path=customXml/itemProps2.xml><?xml version="1.0" encoding="utf-8"?>
 <ds:datastoreItem xmlns:ds="http://schemas.openxmlformats.org/officeDocument/2006/customXml" ds:itemID="{62CF8670-35D1-4455-AC7A-762B7388BE22}">
   <ds:schemaRefs>
     <ds:schemaRef ds:uri="http://schemas.microsoft.com/office/2006/metadata/contentType"/>
@@ -21764,6 +22010,14 @@
 </ds:datastoreItem>
 </file>
 
+<file path=customXml/itemProps2.xml><?xml version="1.0" encoding="utf-8"?>
+<ds:datastoreItem xmlns:ds="http://schemas.openxmlformats.org/officeDocument/2006/customXml" ds:itemID="{43C4A95C-9007-4EA6-944B-306B6F2A0100}">
+  <ds:schemaRefs>
+    <ds:schemaRef ds:uri="http://schemas.microsoft.com/sharepoint/v3/contenttype/forms"/>
+  </ds:schemaRefs>
+</ds:datastoreItem>
+</file>
+
 <file path=customXml/itemProps3.xml><?xml version="1.0" encoding="utf-8"?>
 <ds:datastoreItem xmlns:ds="http://schemas.openxmlformats.org/officeDocument/2006/customXml" ds:itemID="{EA4A3FD6-E6BF-490E-B6B4-6A011394B0EB}">
   <ds:schemaRefs>
